--- a/docs/architecture_deck.pptx
+++ b/docs/architecture_deck.pptx
@@ -939,7 +939,7 @@
           <a:lstStyle/>
           <a:p>
             <a:r>
-              <a:t>Front-loaded the pipeline because it unblocks UI and eval. Auto-grouping is a spike — if it doesn't tune well, we ship per-domain routing for v0.8 and revisit.</a:t>
+              <a:t>Reordered to match what's actually unfinished: the first two days finish the semantic and graph layers (the deck calls those 'in progress' for a reason), Mon lights up the end-to-end pipeline, Tue–Wed land validation + UI, Thu hardens, Fri is demo. No buffer — risks slide flags fallbacks if any one day slips.</a:t>
             </a:r>
           </a:p>
         </p:txBody>
@@ -8332,7 +8332,7 @@
                 </a:solidFill>
                 <a:latin typeface="Helvetica Neue"/>
               </a:rPr>
-              <a:t>Pipeline scaffold + auto-grouping spike</a:t>
+              <a:t>Semantic schema — finish per-table profiles + tune routing</a:t>
             </a:r>
           </a:p>
         </p:txBody>
@@ -8367,7 +8367,7 @@
                 </a:solidFill>
                 <a:latin typeface="Helvetica Neue"/>
               </a:rPr>
-              <a:t>•  Wire question → semantic search → graph join into a single orchestrator</a:t>
+              <a:t>•  Build per-table semantic blobs across the full 1,048-table model (today only the demo DB is covered)</a:t>
             </a:r>
           </a:p>
         </p:txBody>
@@ -8402,7 +8402,7 @@
                 </a:solidFill>
                 <a:latin typeface="Helvetica Neue"/>
               </a:rPr>
-              <a:t>•  Spike Leiden auto-grouping inside oversize domains for sharper routing</a:t>
+              <a:t>•  Tune cluster + table routing thresholds; lock the top-3 retrieval mix</a:t>
             </a:r>
           </a:p>
         </p:txBody>
@@ -8437,7 +8437,7 @@
                 </a:solidFill>
                 <a:latin typeface="Helvetica Neue"/>
               </a:rPr>
-              <a:t>•  Verify the platform handles real-world databases that have non-Ed-Fi tables</a:t>
+              <a:t>•  Wire entity-resolver tiers 1–2 (Bloom + fuzzy) end-to-end</a:t>
             </a:r>
           </a:p>
         </p:txBody>
@@ -8507,7 +8507,7 @@
                 </a:solidFill>
                 <a:latin typeface="Helvetica Neue"/>
               </a:rPr>
-              <a:t>Pipeline land + retrieval polish</a:t>
+              <a:t>Foreign-key graph — finish weights + Steiner integration</a:t>
             </a:r>
           </a:p>
         </p:txBody>
@@ -8542,7 +8542,7 @@
                 </a:solidFill>
                 <a:latin typeface="Helvetica Neue"/>
               </a:rPr>
-              <a:t>•  Productionize the orchestrator with structured logs at every stage</a:t>
+              <a:t>•  Apply weighted edges across the full Ed-Fi graph; verify &lt;10 MB load + &lt;100 ms startup</a:t>
             </a:r>
           </a:p>
         </p:txBody>
@@ -8577,7 +8577,7 @@
                 </a:solidFill>
                 <a:latin typeface="Helvetica Neue"/>
               </a:rPr>
-              <a:t>•  Add proven-query retrieval (top-3 examples passed to the SQL generator)</a:t>
+              <a:t>•  Land bidirectional Dijkstra (k=2) + KMB Steiner (k=3–8) behind a single solver entrypoint</a:t>
             </a:r>
           </a:p>
         </p:txBody>
@@ -8612,7 +8612,7 @@
                 </a:solidFill>
                 <a:latin typeface="Helvetica Neue"/>
               </a:rPr>
-              <a:t>•  First end-to-end NL → SQL → rows on the demo SQLite database</a:t>
+              <a:t>•  Integrate with the new unknown-table reflection path so non-Ed-Fi tables join cleanly</a:t>
             </a:r>
           </a:p>
         </p:txBody>
@@ -8682,7 +8682,7 @@
                 </a:solidFill>
                 <a:latin typeface="Helvetica Neue"/>
               </a:rPr>
-              <a:t>Validation &amp; repair loop</a:t>
+              <a:t>Question → SQL pipeline — first end-to-end run</a:t>
             </a:r>
           </a:p>
         </p:txBody>
@@ -8717,7 +8717,7 @@
                 </a:solidFill>
                 <a:latin typeface="Helvetica Neue"/>
               </a:rPr>
-              <a:t>•  Parse-check, plan-check, and dry-execute every generated query</a:t>
+              <a:t>•  Wire question → semantic routing → graph join → SQL generator into one orchestrator</a:t>
             </a:r>
           </a:p>
         </p:txBody>
@@ -8752,7 +8752,7 @@
                 </a:solidFill>
                 <a:latin typeface="Helvetica Neue"/>
               </a:rPr>
-              <a:t>•  Three-attempt repair loop for typical failure modes</a:t>
+              <a:t>•  Add proven-query retrieval (top-3 examples passed to the SQL generator)</a:t>
             </a:r>
           </a:p>
         </p:txBody>
@@ -8787,7 +8787,7 @@
                 </a:solidFill>
                 <a:latin typeface="Helvetica Neue"/>
               </a:rPr>
-              <a:t>•  Expand the gold-query test suite to 50 questions; run nightly</a:t>
+              <a:t>•  First green NL → SQL → rows trace on the demo SQLite DB; structured logs at every stage</a:t>
             </a:r>
           </a:p>
         </p:txBody>
@@ -8857,7 +8857,7 @@
                 </a:solidFill>
                 <a:latin typeface="Helvetica Neue"/>
               </a:rPr>
-              <a:t>Charts, descriptions, and Settings UI</a:t>
+              <a:t>Validation &amp; repair loop + Tier-3/4 entity resolution</a:t>
             </a:r>
           </a:p>
         </p:txBody>
@@ -8892,7 +8892,7 @@
                 </a:solidFill>
                 <a:latin typeface="Helvetica Neue"/>
               </a:rPr>
-              <a:t>•  Auto-pick chart type from result shape (Vega-Lite spec generation)</a:t>
+              <a:t>•  Parse-check, plan-check, and dry-execute every generated query</a:t>
             </a:r>
           </a:p>
         </p:txBody>
@@ -8927,7 +8927,7 @@
                 </a:solidFill>
                 <a:latin typeface="Helvetica Neue"/>
               </a:rPr>
-              <a:t>•  Plain-English answer summary running in parallel with chart render</a:t>
+              <a:t>•  Three-attempt repair loop for typical failure modes</a:t>
             </a:r>
           </a:p>
         </p:txBody>
@@ -8962,7 +8962,7 @@
                 </a:solidFill>
                 <a:latin typeface="Helvetica Neue"/>
               </a:rPr>
-              <a:t>•  Settings page editable end-to-end — pick database, LLM, embedding via UI</a:t>
+              <a:t>•  Land semantic + LLM disambiguation tiers; expand gold-query suite to 50 questions</a:t>
             </a:r>
           </a:p>
         </p:txBody>
@@ -9032,7 +9032,7 @@
                 </a:solidFill>
                 <a:latin typeface="Helvetica Neue"/>
               </a:rPr>
-              <a:t>Eval dashboard + cluster manager</a:t>
+              <a:t>Charts, descriptions, Settings UI editable end-to-end</a:t>
             </a:r>
           </a:p>
         </p:txBody>
@@ -9067,7 +9067,7 @@
                 </a:solidFill>
                 <a:latin typeface="Helvetica Neue"/>
               </a:rPr>
-              <a:t>•  Eval Dashboard page: per-build metrics, regression alerts</a:t>
+              <a:t>•  Auto-pick chart type from result shape (Vega-Lite spec generation)</a:t>
             </a:r>
           </a:p>
         </p:txBody>
@@ -9102,7 +9102,7 @@
                 </a:solidFill>
                 <a:latin typeface="Helvetica Neue"/>
               </a:rPr>
-              <a:t>•  Cluster Manager page: drag tables between groups, trigger rebuild</a:t>
+              <a:t>•  Plain-English answer summary running in parallel with chart render</a:t>
             </a:r>
           </a:p>
         </p:txBody>
@@ -9137,7 +9137,7 @@
                 </a:solidFill>
                 <a:latin typeface="Helvetica Neue"/>
               </a:rPr>
-              <a:t>•  Operator runbook + provider-swap guide</a:t>
+              <a:t>•  Settings page fully editable — pick database, LLM, embedding via UI; ship onboarding flow</a:t>
             </a:r>
           </a:p>
         </p:txBody>
@@ -9207,7 +9207,7 @@
                 </a:solidFill>
                 <a:latin typeface="Helvetica Neue"/>
               </a:rPr>
-              <a:t>Hardening + multi-provider polish</a:t>
+              <a:t>Eval dashboard + cluster manager UI + hardening</a:t>
             </a:r>
           </a:p>
         </p:txBody>
@@ -9242,7 +9242,7 @@
                 </a:solidFill>
                 <a:latin typeface="Helvetica Neue"/>
               </a:rPr>
-              <a:t>•  Multi-provider matrix tested across all combinations</a:t>
+              <a:t>•  Eval Dashboard page: per-build metrics, regression alerts</a:t>
             </a:r>
           </a:p>
         </p:txBody>
@@ -9277,7 +9277,7 @@
                 </a:solidFill>
                 <a:latin typeface="Helvetica Neue"/>
               </a:rPr>
-              <a:t>•  Performance pass — caching, observability dashboards</a:t>
+              <a:t>•  Cluster Manager page: drag tables between groups, trigger rebuild from UI</a:t>
             </a:r>
           </a:p>
         </p:txBody>
@@ -9312,7 +9312,7 @@
                 </a:solidFill>
                 <a:latin typeface="Helvetica Neue"/>
               </a:rPr>
-              <a:t>•  Two security fixes flagged in earlier review</a:t>
+              <a:t>•  Multi-provider matrix; observability dashboards; two security fixes flagged in review</a:t>
             </a:r>
           </a:p>
         </p:txBody>
@@ -9417,7 +9417,7 @@
                 </a:solidFill>
                 <a:latin typeface="Helvetica Neue"/>
               </a:rPr>
-              <a:t>•  End-to-end run on a clean Mac and Windows machine</a:t>
+              <a:t>•  End-to-end dry-run on a clean Mac and Windows machine</a:t>
             </a:r>
           </a:p>
         </p:txBody>
@@ -9452,7 +9452,7 @@
                 </a:solidFill>
                 <a:latin typeface="Helvetica Neue"/>
               </a:rPr>
-              <a:t>•  Recorded demo: connect database → ask question → see chart + summary</a:t>
+              <a:t>•  Recorded demo: connect DB → ask question → see SQL + rows + chart + summary</a:t>
             </a:r>
           </a:p>
         </p:txBody>
@@ -9487,7 +9487,7 @@
                 </a:solidFill>
                 <a:latin typeface="Helvetica Neue"/>
               </a:rPr>
-              <a:t>•  v0.8 release tag pushed; final docs</a:t>
+              <a:t>•  v0.8 release tag + operator runbook + provider-swap guide</a:t>
             </a:r>
           </a:p>
         </p:txBody>

--- a/docs/architecture_deck.pptx
+++ b/docs/architecture_deck.pptx
@@ -659,7 +659,7 @@
           <a:lstStyle/>
           <a:p>
             <a:r>
-              <a:t>If semantic gives us 'these 5 tables', graph tells us 'this is the cheapest, most natural way to connect them'. Without it, even an LLM that knows Ed-Fi well would burn time guessing join paths. Today: shortest-path + Steiner-tree scaffolding running on the demo DB. Next 7 days: tune weights on the full Ed-Fi model and verify behavior on the unknown-table reflection path.</a:t>
+              <a:t>If semantic gives us 'these 5 tables', graph tells us 'this is the cheapest, most natural way to connect them'. Without it, even an LLM that knows Ed-Fi well would burn time guessing join paths. Today: shortest-path + Steiner-tree scaffolding running on the demo DB. Next 6 working days: tune weights on the full Ed-Fimodel and verify behavior on the unknown-table reflection path.</a:t>
             </a:r>
           </a:p>
         </p:txBody>
@@ -1219,7 +1219,7 @@
           <a:lstStyle/>
           <a:p>
             <a:r>
-              <a:t>This single slide is the headline. Cluster Creation is the only workstream that's functionally complete; the semantic schema and foreign-key graph have scaffolding but are still being tuned, and everything else is integration work in flight. That's why the 7-working-day plan is intentionally aggressive but bounded.</a:t>
+              <a:t>This single slide is the headline. Cluster Creation is the only workstream that's functionally complete; the semantic schema and foreign-key graph have scaffolding but are still being tuned, and everything else is integration work in flight. That's why the 6-working-day plan is intentionally aggressive but bounded.</a:t>
             </a:r>
           </a:p>
         </p:txBody>
@@ -1499,7 +1499,7 @@
           <a:lstStyle/>
           <a:p>
             <a:r>
-              <a:t>If we just gave the LLM 1,048 tables and asked it to pick, accuracy would collapse and cost would explode. The semantic layer is the search index that fixes that. Today: per-table profiles + embeddings work end-to-end on the demo DB; next 7 days: tune coverage on the full 1,048-table model and harden the routing thresholds.</a:t>
+              <a:t>If we just gave the LLM 1,048 tables and asked it to pick, accuracy would collapse and cost would explode. The semantic layer is the search index that fixes that. Today: per-table profiles + embeddings work end-to-end on the demo DB; next 6 working days: tune coverage on the full 1,048-table model and harden the routing thresholds.</a:t>
             </a:r>
           </a:p>
         </p:txBody>
@@ -7558,7 +7558,7 @@
                 </a:solidFill>
                 <a:latin typeface="Helvetica Neue"/>
               </a:rPr>
-              <a:t>7 working days · Apr 30 → Fri May 8 · weekend-free</a:t>
+              <a:t>6 working days · Apr 30 → Fri May 8 · May 1 holiday + weekends excluded</a:t>
             </a:r>
           </a:p>
         </p:txBody>
@@ -8216,7 +8216,7 @@
                 </a:solidFill>
                 <a:latin typeface="Helvetica Neue"/>
               </a:rPr>
-              <a:t>Apr 30 → Fri May 8 · 7 working days · weekends excluded</a:t>
+              <a:t>Apr 30 → Fri May 8 · 6 working days · May 1 holiday + weekends excluded</a:t>
             </a:r>
           </a:p>
         </p:txBody>
@@ -8472,7 +8472,7 @@
                 </a:solidFill>
                 <a:latin typeface="Helvetica Neue"/>
               </a:rPr>
-              <a:t>Fri May 1</a:t>
+              <a:t>Mon May 4</a:t>
             </a:r>
           </a:p>
         </p:txBody>
@@ -8507,7 +8507,7 @@
                 </a:solidFill>
                 <a:latin typeface="Helvetica Neue"/>
               </a:rPr>
-              <a:t>Foreign-key graph — finish weights + Steiner integration</a:t>
+              <a:t>Foreign-key graph + first end-to-end pipeline run</a:t>
             </a:r>
           </a:p>
         </p:txBody>
@@ -8612,7 +8612,7 @@
                 </a:solidFill>
                 <a:latin typeface="Helvetica Neue"/>
               </a:rPr>
-              <a:t>•  Integrate with the new unknown-table reflection path so non-Ed-Fi tables join cleanly</a:t>
+              <a:t>•  Wire question → semantic routing → graph join → SQL generator into one orchestrator</a:t>
             </a:r>
           </a:p>
         </p:txBody>
@@ -8625,7 +8625,42 @@
         </p:nvSpPr>
         <p:spPr>
           <a:xfrm>
-            <a:off x="640080" y="3300983"/>
+            <a:off x="2286000" y="3218687"/>
+            <a:ext cx="9418320" cy="228600"/>
+          </a:xfrm>
+          <a:prstGeom prst="rect">
+            <a:avLst/>
+          </a:prstGeom>
+          <a:noFill/>
+        </p:spPr>
+        <p:txBody>
+          <a:bodyPr wrap="square" lIns="45720" rIns="45720">
+            <a:spAutoFit/>
+          </a:bodyPr>
+          <a:lstStyle/>
+          <a:p>
+            <a:pPr algn="l"/>
+            <a:r>
+              <a:rPr sz="1000" b="0">
+                <a:solidFill>
+                  <a:srgbClr val="8A95A5"/>
+                </a:solidFill>
+                <a:latin typeface="Helvetica Neue"/>
+              </a:rPr>
+              <a:t>•  First green NL → SQL → rows trace on the demo SQLite DB</a:t>
+            </a:r>
+          </a:p>
+        </p:txBody>
+      </p:sp>
+      <p:sp>
+        <p:nvSpPr>
+          <p:cNvPr id="16" name="TextBox 15"/>
+          <p:cNvSpPr txBox="1"/>
+          <p:nvPr/>
+        </p:nvSpPr>
+        <p:spPr>
+          <a:xfrm>
+            <a:off x="640080" y="3493007"/>
             <a:ext cx="1554480" cy="274320"/>
           </a:xfrm>
           <a:prstGeom prst="rect">
@@ -8647,20 +8682,20 @@
                 </a:solidFill>
                 <a:latin typeface="Helvetica Neue"/>
               </a:rPr>
-              <a:t>Mon May 4</a:t>
-            </a:r>
-          </a:p>
-        </p:txBody>
-      </p:sp>
-      <p:sp>
-        <p:nvSpPr>
-          <p:cNvPr id="16" name="TextBox 15"/>
-          <p:cNvSpPr txBox="1"/>
-          <p:nvPr/>
-        </p:nvSpPr>
-        <p:spPr>
-          <a:xfrm>
-            <a:off x="2286000" y="3300983"/>
+              <a:t>Tue May 5</a:t>
+            </a:r>
+          </a:p>
+        </p:txBody>
+      </p:sp>
+      <p:sp>
+        <p:nvSpPr>
+          <p:cNvPr id="17" name="TextBox 16"/>
+          <p:cNvSpPr txBox="1"/>
+          <p:nvPr/>
+        </p:nvSpPr>
+        <p:spPr>
+          <a:xfrm>
+            <a:off x="2286000" y="3493007"/>
             <a:ext cx="9418320" cy="274320"/>
           </a:xfrm>
           <a:prstGeom prst="rect">
@@ -8682,42 +8717,7 @@
                 </a:solidFill>
                 <a:latin typeface="Helvetica Neue"/>
               </a:rPr>
-              <a:t>Question → SQL pipeline — first end-to-end run</a:t>
-            </a:r>
-          </a:p>
-        </p:txBody>
-      </p:sp>
-      <p:sp>
-        <p:nvSpPr>
-          <p:cNvPr id="17" name="TextBox 16"/>
-          <p:cNvSpPr txBox="1"/>
-          <p:nvPr/>
-        </p:nvSpPr>
-        <p:spPr>
-          <a:xfrm>
-            <a:off x="2286000" y="3493007"/>
-            <a:ext cx="9418320" cy="228600"/>
-          </a:xfrm>
-          <a:prstGeom prst="rect">
-            <a:avLst/>
-          </a:prstGeom>
-          <a:noFill/>
-        </p:spPr>
-        <p:txBody>
-          <a:bodyPr wrap="square" lIns="45720" rIns="45720">
-            <a:spAutoFit/>
-          </a:bodyPr>
-          <a:lstStyle/>
-          <a:p>
-            <a:pPr algn="l"/>
-            <a:r>
-              <a:rPr sz="1000" b="0">
-                <a:solidFill>
-                  <a:srgbClr val="8A95A5"/>
-                </a:solidFill>
-                <a:latin typeface="Helvetica Neue"/>
-              </a:rPr>
-              <a:t>•  Wire question → semantic routing → graph join → SQL generator into one orchestrator</a:t>
+              <a:t>Validation &amp; repair loop + Tier-3/4 entity resolution</a:t>
             </a:r>
           </a:p>
         </p:txBody>
@@ -8752,7 +8752,7 @@
                 </a:solidFill>
                 <a:latin typeface="Helvetica Neue"/>
               </a:rPr>
-              <a:t>•  Add proven-query retrieval (top-3 examples passed to the SQL generator)</a:t>
+              <a:t>•  Parse-check, plan-check, and dry-execute every generated query</a:t>
             </a:r>
           </a:p>
         </p:txBody>
@@ -8787,7 +8787,7 @@
                 </a:solidFill>
                 <a:latin typeface="Helvetica Neue"/>
               </a:rPr>
-              <a:t>•  First green NL → SQL → rows trace on the demo SQLite DB; structured logs at every stage</a:t>
+              <a:t>•  Three-attempt repair loop for typical failure modes</a:t>
             </a:r>
           </a:p>
         </p:txBody>
@@ -8800,7 +8800,42 @@
         </p:nvSpPr>
         <p:spPr>
           <a:xfrm>
-            <a:off x="640080" y="4151375"/>
+            <a:off x="2286000" y="4069079"/>
+            <a:ext cx="9418320" cy="228600"/>
+          </a:xfrm>
+          <a:prstGeom prst="rect">
+            <a:avLst/>
+          </a:prstGeom>
+          <a:noFill/>
+        </p:spPr>
+        <p:txBody>
+          <a:bodyPr wrap="square" lIns="45720" rIns="45720">
+            <a:spAutoFit/>
+          </a:bodyPr>
+          <a:lstStyle/>
+          <a:p>
+            <a:pPr algn="l"/>
+            <a:r>
+              <a:rPr sz="1000" b="0">
+                <a:solidFill>
+                  <a:srgbClr val="8A95A5"/>
+                </a:solidFill>
+                <a:latin typeface="Helvetica Neue"/>
+              </a:rPr>
+              <a:t>•  Land semantic + LLM disambiguation tiers; expand gold-query suite to 50 questions</a:t>
+            </a:r>
+          </a:p>
+        </p:txBody>
+      </p:sp>
+      <p:sp>
+        <p:nvSpPr>
+          <p:cNvPr id="21" name="TextBox 20"/>
+          <p:cNvSpPr txBox="1"/>
+          <p:nvPr/>
+        </p:nvSpPr>
+        <p:spPr>
+          <a:xfrm>
+            <a:off x="640080" y="4343399"/>
             <a:ext cx="1554480" cy="274320"/>
           </a:xfrm>
           <a:prstGeom prst="rect">
@@ -8822,20 +8857,20 @@
                 </a:solidFill>
                 <a:latin typeface="Helvetica Neue"/>
               </a:rPr>
-              <a:t>Tue May 5</a:t>
-            </a:r>
-          </a:p>
-        </p:txBody>
-      </p:sp>
-      <p:sp>
-        <p:nvSpPr>
-          <p:cNvPr id="21" name="TextBox 20"/>
-          <p:cNvSpPr txBox="1"/>
-          <p:nvPr/>
-        </p:nvSpPr>
-        <p:spPr>
-          <a:xfrm>
-            <a:off x="2286000" y="4151375"/>
+              <a:t>Wed May 6</a:t>
+            </a:r>
+          </a:p>
+        </p:txBody>
+      </p:sp>
+      <p:sp>
+        <p:nvSpPr>
+          <p:cNvPr id="22" name="TextBox 21"/>
+          <p:cNvSpPr txBox="1"/>
+          <p:nvPr/>
+        </p:nvSpPr>
+        <p:spPr>
+          <a:xfrm>
+            <a:off x="2286000" y="4343399"/>
             <a:ext cx="9418320" cy="274320"/>
           </a:xfrm>
           <a:prstGeom prst="rect">
@@ -8857,42 +8892,7 @@
                 </a:solidFill>
                 <a:latin typeface="Helvetica Neue"/>
               </a:rPr>
-              <a:t>Validation &amp; repair loop + Tier-3/4 entity resolution</a:t>
-            </a:r>
-          </a:p>
-        </p:txBody>
-      </p:sp>
-      <p:sp>
-        <p:nvSpPr>
-          <p:cNvPr id="22" name="TextBox 21"/>
-          <p:cNvSpPr txBox="1"/>
-          <p:nvPr/>
-        </p:nvSpPr>
-        <p:spPr>
-          <a:xfrm>
-            <a:off x="2286000" y="4343399"/>
-            <a:ext cx="9418320" cy="228600"/>
-          </a:xfrm>
-          <a:prstGeom prst="rect">
-            <a:avLst/>
-          </a:prstGeom>
-          <a:noFill/>
-        </p:spPr>
-        <p:txBody>
-          <a:bodyPr wrap="square" lIns="45720" rIns="45720">
-            <a:spAutoFit/>
-          </a:bodyPr>
-          <a:lstStyle/>
-          <a:p>
-            <a:pPr algn="l"/>
-            <a:r>
-              <a:rPr sz="1000" b="0">
-                <a:solidFill>
-                  <a:srgbClr val="8A95A5"/>
-                </a:solidFill>
-                <a:latin typeface="Helvetica Neue"/>
-              </a:rPr>
-              <a:t>•  Parse-check, plan-check, and dry-execute every generated query</a:t>
+              <a:t>Charts, descriptions, Settings UI editable end-to-end</a:t>
             </a:r>
           </a:p>
         </p:txBody>
@@ -8927,7 +8927,7 @@
                 </a:solidFill>
                 <a:latin typeface="Helvetica Neue"/>
               </a:rPr>
-              <a:t>•  Three-attempt repair loop for typical failure modes</a:t>
+              <a:t>•  Auto-pick chart type from result shape (Vega-Lite spec generation)</a:t>
             </a:r>
           </a:p>
         </p:txBody>
@@ -8962,7 +8962,7 @@
                 </a:solidFill>
                 <a:latin typeface="Helvetica Neue"/>
               </a:rPr>
-              <a:t>•  Land semantic + LLM disambiguation tiers; expand gold-query suite to 50 questions</a:t>
+              <a:t>•  Plain-English answer summary running in parallel with chart render</a:t>
             </a:r>
           </a:p>
         </p:txBody>
@@ -8975,7 +8975,42 @@
         </p:nvSpPr>
         <p:spPr>
           <a:xfrm>
-            <a:off x="640080" y="5001767"/>
+            <a:off x="2286000" y="4919471"/>
+            <a:ext cx="9418320" cy="228600"/>
+          </a:xfrm>
+          <a:prstGeom prst="rect">
+            <a:avLst/>
+          </a:prstGeom>
+          <a:noFill/>
+        </p:spPr>
+        <p:txBody>
+          <a:bodyPr wrap="square" lIns="45720" rIns="45720">
+            <a:spAutoFit/>
+          </a:bodyPr>
+          <a:lstStyle/>
+          <a:p>
+            <a:pPr algn="l"/>
+            <a:r>
+              <a:rPr sz="1000" b="0">
+                <a:solidFill>
+                  <a:srgbClr val="8A95A5"/>
+                </a:solidFill>
+                <a:latin typeface="Helvetica Neue"/>
+              </a:rPr>
+              <a:t>•  Settings page fully editable — pick database, LLM, embedding via UI; ship onboarding flow</a:t>
+            </a:r>
+          </a:p>
+        </p:txBody>
+      </p:sp>
+      <p:sp>
+        <p:nvSpPr>
+          <p:cNvPr id="26" name="TextBox 25"/>
+          <p:cNvSpPr txBox="1"/>
+          <p:nvPr/>
+        </p:nvSpPr>
+        <p:spPr>
+          <a:xfrm>
+            <a:off x="640080" y="5193791"/>
             <a:ext cx="1554480" cy="274320"/>
           </a:xfrm>
           <a:prstGeom prst="rect">
@@ -8997,20 +9032,20 @@
                 </a:solidFill>
                 <a:latin typeface="Helvetica Neue"/>
               </a:rPr>
-              <a:t>Wed May 6</a:t>
-            </a:r>
-          </a:p>
-        </p:txBody>
-      </p:sp>
-      <p:sp>
-        <p:nvSpPr>
-          <p:cNvPr id="26" name="TextBox 25"/>
-          <p:cNvSpPr txBox="1"/>
-          <p:nvPr/>
-        </p:nvSpPr>
-        <p:spPr>
-          <a:xfrm>
-            <a:off x="2286000" y="5001767"/>
+              <a:t>Thu May 7</a:t>
+            </a:r>
+          </a:p>
+        </p:txBody>
+      </p:sp>
+      <p:sp>
+        <p:nvSpPr>
+          <p:cNvPr id="27" name="TextBox 26"/>
+          <p:cNvSpPr txBox="1"/>
+          <p:nvPr/>
+        </p:nvSpPr>
+        <p:spPr>
+          <a:xfrm>
+            <a:off x="2286000" y="5193791"/>
             <a:ext cx="9418320" cy="274320"/>
           </a:xfrm>
           <a:prstGeom prst="rect">
@@ -9032,42 +9067,7 @@
                 </a:solidFill>
                 <a:latin typeface="Helvetica Neue"/>
               </a:rPr>
-              <a:t>Charts, descriptions, Settings UI editable end-to-end</a:t>
-            </a:r>
-          </a:p>
-        </p:txBody>
-      </p:sp>
-      <p:sp>
-        <p:nvSpPr>
-          <p:cNvPr id="27" name="TextBox 26"/>
-          <p:cNvSpPr txBox="1"/>
-          <p:nvPr/>
-        </p:nvSpPr>
-        <p:spPr>
-          <a:xfrm>
-            <a:off x="2286000" y="5193791"/>
-            <a:ext cx="9418320" cy="228600"/>
-          </a:xfrm>
-          <a:prstGeom prst="rect">
-            <a:avLst/>
-          </a:prstGeom>
-          <a:noFill/>
-        </p:spPr>
-        <p:txBody>
-          <a:bodyPr wrap="square" lIns="45720" rIns="45720">
-            <a:spAutoFit/>
-          </a:bodyPr>
-          <a:lstStyle/>
-          <a:p>
-            <a:pPr algn="l"/>
-            <a:r>
-              <a:rPr sz="1000" b="0">
-                <a:solidFill>
-                  <a:srgbClr val="8A95A5"/>
-                </a:solidFill>
-                <a:latin typeface="Helvetica Neue"/>
-              </a:rPr>
-              <a:t>•  Auto-pick chart type from result shape (Vega-Lite spec generation)</a:t>
+              <a:t>Eval dashboard + cluster manager UI + hardening</a:t>
             </a:r>
           </a:p>
         </p:txBody>
@@ -9102,7 +9102,7 @@
                 </a:solidFill>
                 <a:latin typeface="Helvetica Neue"/>
               </a:rPr>
-              <a:t>•  Plain-English answer summary running in parallel with chart render</a:t>
+              <a:t>•  Eval Dashboard page: per-build metrics, regression alerts</a:t>
             </a:r>
           </a:p>
         </p:txBody>
@@ -9137,7 +9137,7 @@
                 </a:solidFill>
                 <a:latin typeface="Helvetica Neue"/>
               </a:rPr>
-              <a:t>•  Settings page fully editable — pick database, LLM, embedding via UI; ship onboarding flow</a:t>
+              <a:t>•  Cluster Manager page: drag tables between groups, trigger rebuild from UI</a:t>
             </a:r>
           </a:p>
         </p:txBody>
@@ -9150,7 +9150,42 @@
         </p:nvSpPr>
         <p:spPr>
           <a:xfrm>
-            <a:off x="640080" y="5852159"/>
+            <a:off x="2286000" y="5769863"/>
+            <a:ext cx="9418320" cy="228600"/>
+          </a:xfrm>
+          <a:prstGeom prst="rect">
+            <a:avLst/>
+          </a:prstGeom>
+          <a:noFill/>
+        </p:spPr>
+        <p:txBody>
+          <a:bodyPr wrap="square" lIns="45720" rIns="45720">
+            <a:spAutoFit/>
+          </a:bodyPr>
+          <a:lstStyle/>
+          <a:p>
+            <a:pPr algn="l"/>
+            <a:r>
+              <a:rPr sz="1000" b="0">
+                <a:solidFill>
+                  <a:srgbClr val="8A95A5"/>
+                </a:solidFill>
+                <a:latin typeface="Helvetica Neue"/>
+              </a:rPr>
+              <a:t>•  Multi-provider matrix; observability dashboards; two security fixes flagged in review</a:t>
+            </a:r>
+          </a:p>
+        </p:txBody>
+      </p:sp>
+      <p:sp>
+        <p:nvSpPr>
+          <p:cNvPr id="31" name="TextBox 30"/>
+          <p:cNvSpPr txBox="1"/>
+          <p:nvPr/>
+        </p:nvSpPr>
+        <p:spPr>
+          <a:xfrm>
+            <a:off x="640080" y="6044183"/>
             <a:ext cx="1554480" cy="274320"/>
           </a:xfrm>
           <a:prstGeom prst="rect">
@@ -9172,20 +9207,20 @@
                 </a:solidFill>
                 <a:latin typeface="Helvetica Neue"/>
               </a:rPr>
-              <a:t>Thu May 7</a:t>
-            </a:r>
-          </a:p>
-        </p:txBody>
-      </p:sp>
-      <p:sp>
-        <p:nvSpPr>
-          <p:cNvPr id="31" name="TextBox 30"/>
-          <p:cNvSpPr txBox="1"/>
-          <p:nvPr/>
-        </p:nvSpPr>
-        <p:spPr>
-          <a:xfrm>
-            <a:off x="2286000" y="5852159"/>
+              <a:t>Fri May 8</a:t>
+            </a:r>
+          </a:p>
+        </p:txBody>
+      </p:sp>
+      <p:sp>
+        <p:nvSpPr>
+          <p:cNvPr id="32" name="TextBox 31"/>
+          <p:cNvSpPr txBox="1"/>
+          <p:nvPr/>
+        </p:nvSpPr>
+        <p:spPr>
+          <a:xfrm>
+            <a:off x="2286000" y="6044183"/>
             <a:ext cx="9418320" cy="274320"/>
           </a:xfrm>
           <a:prstGeom prst="rect">
@@ -9207,42 +9242,7 @@
                 </a:solidFill>
                 <a:latin typeface="Helvetica Neue"/>
               </a:rPr>
-              <a:t>Eval dashboard + cluster manager UI + hardening</a:t>
-            </a:r>
-          </a:p>
-        </p:txBody>
-      </p:sp>
-      <p:sp>
-        <p:nvSpPr>
-          <p:cNvPr id="32" name="TextBox 31"/>
-          <p:cNvSpPr txBox="1"/>
-          <p:nvPr/>
-        </p:nvSpPr>
-        <p:spPr>
-          <a:xfrm>
-            <a:off x="2286000" y="6044183"/>
-            <a:ext cx="9418320" cy="228600"/>
-          </a:xfrm>
-          <a:prstGeom prst="rect">
-            <a:avLst/>
-          </a:prstGeom>
-          <a:noFill/>
-        </p:spPr>
-        <p:txBody>
-          <a:bodyPr wrap="square" lIns="45720" rIns="45720">
-            <a:spAutoFit/>
-          </a:bodyPr>
-          <a:lstStyle/>
-          <a:p>
-            <a:pPr algn="l"/>
-            <a:r>
-              <a:rPr sz="1000" b="0">
-                <a:solidFill>
-                  <a:srgbClr val="8A95A5"/>
-                </a:solidFill>
-                <a:latin typeface="Helvetica Neue"/>
-              </a:rPr>
-              <a:t>•  Eval Dashboard page: per-build metrics, regression alerts</a:t>
+              <a:t>Demo prep + release</a:t>
             </a:r>
           </a:p>
         </p:txBody>
@@ -9277,7 +9277,7 @@
                 </a:solidFill>
                 <a:latin typeface="Helvetica Neue"/>
               </a:rPr>
-              <a:t>•  Cluster Manager page: drag tables between groups, trigger rebuild from UI</a:t>
+              <a:t>•  End-to-end dry-run on a clean Mac and Windows machine</a:t>
             </a:r>
           </a:p>
         </p:txBody>
@@ -9312,7 +9312,7 @@
                 </a:solidFill>
                 <a:latin typeface="Helvetica Neue"/>
               </a:rPr>
-              <a:t>•  Multi-provider matrix; observability dashboards; two security fixes flagged in review</a:t>
+              <a:t>•  Recorded demo: connect DB → ask question → see SQL + rows + chart + summary</a:t>
             </a:r>
           </a:p>
         </p:txBody>
@@ -9325,29 +9325,29 @@
         </p:nvSpPr>
         <p:spPr>
           <a:xfrm>
-            <a:off x="640080" y="6702551"/>
-            <a:ext cx="1554480" cy="274320"/>
-          </a:xfrm>
-          <a:prstGeom prst="rect">
-            <a:avLst/>
-          </a:prstGeom>
-          <a:noFill/>
-        </p:spPr>
-        <p:txBody>
-          <a:bodyPr wrap="square" lIns="45720" rIns="45720">
-            <a:spAutoFit/>
-          </a:bodyPr>
-          <a:lstStyle/>
-          <a:p>
-            <a:pPr algn="l"/>
-            <a:r>
-              <a:rPr sz="1200" b="1">
-                <a:solidFill>
-                  <a:srgbClr val="6EC1FF"/>
-                </a:solidFill>
-                <a:latin typeface="Helvetica Neue"/>
-              </a:rPr>
-              <a:t>Fri May 8</a:t>
+            <a:off x="2286000" y="6620255"/>
+            <a:ext cx="9418320" cy="228600"/>
+          </a:xfrm>
+          <a:prstGeom prst="rect">
+            <a:avLst/>
+          </a:prstGeom>
+          <a:noFill/>
+        </p:spPr>
+        <p:txBody>
+          <a:bodyPr wrap="square" lIns="45720" rIns="45720">
+            <a:spAutoFit/>
+          </a:bodyPr>
+          <a:lstStyle/>
+          <a:p>
+            <a:pPr algn="l"/>
+            <a:r>
+              <a:rPr sz="1000" b="0">
+                <a:solidFill>
+                  <a:srgbClr val="8A95A5"/>
+                </a:solidFill>
+                <a:latin typeface="Helvetica Neue"/>
+              </a:rPr>
+              <a:t>•  v0.8 release tag + operator runbook + provider-swap guide</a:t>
             </a:r>
           </a:p>
         </p:txBody>
@@ -9355,146 +9355,6 @@
       <p:sp>
         <p:nvSpPr>
           <p:cNvPr id="36" name="TextBox 35"/>
-          <p:cNvSpPr txBox="1"/>
-          <p:nvPr/>
-        </p:nvSpPr>
-        <p:spPr>
-          <a:xfrm>
-            <a:off x="2286000" y="6702551"/>
-            <a:ext cx="9418320" cy="274320"/>
-          </a:xfrm>
-          <a:prstGeom prst="rect">
-            <a:avLst/>
-          </a:prstGeom>
-          <a:noFill/>
-        </p:spPr>
-        <p:txBody>
-          <a:bodyPr wrap="square" lIns="45720" rIns="45720">
-            <a:spAutoFit/>
-          </a:bodyPr>
-          <a:lstStyle/>
-          <a:p>
-            <a:pPr algn="l"/>
-            <a:r>
-              <a:rPr sz="1200" b="1">
-                <a:solidFill>
-                  <a:srgbClr val="E6EAF0"/>
-                </a:solidFill>
-                <a:latin typeface="Helvetica Neue"/>
-              </a:rPr>
-              <a:t>Demo prep + release</a:t>
-            </a:r>
-          </a:p>
-        </p:txBody>
-      </p:sp>
-      <p:sp>
-        <p:nvSpPr>
-          <p:cNvPr id="37" name="TextBox 36"/>
-          <p:cNvSpPr txBox="1"/>
-          <p:nvPr/>
-        </p:nvSpPr>
-        <p:spPr>
-          <a:xfrm>
-            <a:off x="2286000" y="6894575"/>
-            <a:ext cx="9418320" cy="228600"/>
-          </a:xfrm>
-          <a:prstGeom prst="rect">
-            <a:avLst/>
-          </a:prstGeom>
-          <a:noFill/>
-        </p:spPr>
-        <p:txBody>
-          <a:bodyPr wrap="square" lIns="45720" rIns="45720">
-            <a:spAutoFit/>
-          </a:bodyPr>
-          <a:lstStyle/>
-          <a:p>
-            <a:pPr algn="l"/>
-            <a:r>
-              <a:rPr sz="1000" b="0">
-                <a:solidFill>
-                  <a:srgbClr val="8A95A5"/>
-                </a:solidFill>
-                <a:latin typeface="Helvetica Neue"/>
-              </a:rPr>
-              <a:t>•  End-to-end dry-run on a clean Mac and Windows machine</a:t>
-            </a:r>
-          </a:p>
-        </p:txBody>
-      </p:sp>
-      <p:sp>
-        <p:nvSpPr>
-          <p:cNvPr id="38" name="TextBox 37"/>
-          <p:cNvSpPr txBox="1"/>
-          <p:nvPr/>
-        </p:nvSpPr>
-        <p:spPr>
-          <a:xfrm>
-            <a:off x="2286000" y="7086599"/>
-            <a:ext cx="9418320" cy="228600"/>
-          </a:xfrm>
-          <a:prstGeom prst="rect">
-            <a:avLst/>
-          </a:prstGeom>
-          <a:noFill/>
-        </p:spPr>
-        <p:txBody>
-          <a:bodyPr wrap="square" lIns="45720" rIns="45720">
-            <a:spAutoFit/>
-          </a:bodyPr>
-          <a:lstStyle/>
-          <a:p>
-            <a:pPr algn="l"/>
-            <a:r>
-              <a:rPr sz="1000" b="0">
-                <a:solidFill>
-                  <a:srgbClr val="8A95A5"/>
-                </a:solidFill>
-                <a:latin typeface="Helvetica Neue"/>
-              </a:rPr>
-              <a:t>•  Recorded demo: connect DB → ask question → see SQL + rows + chart + summary</a:t>
-            </a:r>
-          </a:p>
-        </p:txBody>
-      </p:sp>
-      <p:sp>
-        <p:nvSpPr>
-          <p:cNvPr id="39" name="TextBox 38"/>
-          <p:cNvSpPr txBox="1"/>
-          <p:nvPr/>
-        </p:nvSpPr>
-        <p:spPr>
-          <a:xfrm>
-            <a:off x="2286000" y="7278623"/>
-            <a:ext cx="9418320" cy="228600"/>
-          </a:xfrm>
-          <a:prstGeom prst="rect">
-            <a:avLst/>
-          </a:prstGeom>
-          <a:noFill/>
-        </p:spPr>
-        <p:txBody>
-          <a:bodyPr wrap="square" lIns="45720" rIns="45720">
-            <a:spAutoFit/>
-          </a:bodyPr>
-          <a:lstStyle/>
-          <a:p>
-            <a:pPr algn="l"/>
-            <a:r>
-              <a:rPr sz="1000" b="0">
-                <a:solidFill>
-                  <a:srgbClr val="8A95A5"/>
-                </a:solidFill>
-                <a:latin typeface="Helvetica Neue"/>
-              </a:rPr>
-              <a:t>•  v0.8 release tag + operator runbook + provider-swap guide</a:t>
-            </a:r>
-          </a:p>
-        </p:txBody>
-      </p:sp>
-      <p:sp>
-        <p:nvSpPr>
-          <p:cNvPr id="40" name="TextBox 39"/>
           <p:cNvSpPr txBox="1"/>
           <p:nvPr/>
         </p:nvSpPr>
@@ -9529,7 +9389,7 @@
       </p:sp>
       <p:sp>
         <p:nvSpPr>
-          <p:cNvPr id="41" name="TextBox 40"/>
+          <p:cNvPr id="37" name="TextBox 36"/>
           <p:cNvSpPr txBox="1"/>
           <p:nvPr/>
         </p:nvSpPr>
@@ -11188,7 +11048,7 @@
                 </a:solidFill>
                 <a:latin typeface="Helvetica Neue"/>
               </a:rPr>
-              <a:t>Cluster-creation is the only complete workstream today; everything else is in progress for the 7-day push to demo</a:t>
+              <a:t>Cluster-creation is the only complete workstream today; everything else is in progress for the 6-day push to demo</a:t>
             </a:r>
           </a:p>
         </p:txBody>
@@ -12488,7 +12348,7 @@
                 </a:solidFill>
                 <a:latin typeface="Helvetica Neue"/>
               </a:rPr>
-              <a:t>1 of 8 complete · 7 working days to demo</a:t>
+              <a:t>1 of 8 complete · 6 working days to demo</a:t>
             </a:r>
           </a:p>
         </p:txBody>
@@ -13455,7 +13315,7 @@
                 </a:solidFill>
                 <a:latin typeface="Helvetica Neue"/>
               </a:rPr>
-              <a:t>Green = complete today  ·  Amber = in progress, targeted for the 7-day push</a:t>
+              <a:t>Green = complete today  ·  Amber = in progress, targeted for the 6-day push</a:t>
             </a:r>
           </a:p>
         </p:txBody>

--- a/docs/architecture_deck.pptx
+++ b/docs/architecture_deck.pptx
@@ -523,7 +523,7 @@
           <a:lstStyle/>
           <a:p>
             <a:r>
-              <a:t>Set the room: this is an architecture-and-status review. The platform's foundation is built — knowledge layer, NL→SQL pipeline, agent loop, API, frontend, and ops tooling are all functionally complete and tested. The next 11 working days (Apr 30 through Fri May 15, weekends + May 1 holiday excluded) close the loop on agentic polish, multi-provider hardening, observability, and a recorded demo. v0.9 release is tagged Sat May 16.</a:t>
+              <a:t>Set the room: this is an architecture-and-status review. The platform's foundation is built — knowledge layer, NL→SQL pipeline, agent loop, API, frontend, and ops tooling are all functionally complete and tested. The next six working weeks (Apr 30 through Fri June 12, weekends + May 1 holiday excluded) close the loop on agentic polish, multi-provider hardening, observability, performance, recorded demo, and documentation. v0.9 release is tagged Fri June 13. The honest reason the timeline runs to mid-June: the punch list is real work — provider matrix tests alone span 5 LLMs × 4 embeddings × 3 dialects × 4 consumers — and we've baked in buffer for the inevitable surprises rather than booking a heroics-only plan.</a:t>
             </a:r>
           </a:p>
         </p:txBody>
@@ -1223,7 +1223,7 @@
           <a:lstStyle/>
           <a:p>
             <a:r>
-              <a:t>The honest framing: most of the platform is already built. The May 16 date buys headroom to land the things that matter for a confident demo — provider matrix, agent reliability, and a recorded walkthrough. Observability is the stretch item; if multi-provider work runs long, OTel slips to v0.10 without affecting the demo.</a:t>
+              <a:t>The honest framing: most of the platform is already built. The June 13 date buys real headroom to land the things that matter for a confident demo — provider matrix, agent reliability, observability, performance, and a recorded walkthrough. If observability runs long it slips to v0.10 cleanly without affecting the demo.</a:t>
             </a:r>
           </a:p>
         </p:txBody>
@@ -1363,7 +1363,7 @@
           <a:lstStyle/>
           <a:p>
             <a:r>
-              <a:t>Days 1-2 lead with the matrix because that work is the gate for everything else — provider regressions cascade. Days 3-4 are the agentic + sub-clustering polish. Day 5 is observability (the riskiest item — may compress). Days 6-9 are eval, perf, smoke, and the recorded demo. Days 10-11 are the release-day choreography.</a:t>
+              <a:t>Why six weeks (not eleven days): the punch list is real engineering work, not checklist items. Provider matrix touches 60 distinct combinations and historically surfaces translator-layer bugs that take a half-day each. Leiden tuning needs iteration. Observability work touches every span in the system. Recording a client-facing demo we'd actually ship takes time and re-takes. Six weeks gives honest buffer; if the team finishes early we ship early — but we won't book a heroics-only plan.</a:t>
             </a:r>
           </a:p>
         </p:txBody>
@@ -1433,7 +1433,7 @@
           <a:lstStyle/>
           <a:p>
             <a:r>
-              <a:t>We're not promising perfection by Saturday May 16. We are promising a tested platform with a recorded demo, the multi-provider matrix passing, and stretch items called out before they slip silently.</a:t>
+              <a:t>We're not promising perfection by Friday June 13. We are promising a tested platform with a recorded demo, the multi-provider matrix passing, and stretch items called out before they slip silently. The 6-week timeline is honest engineering scope, not heroics.</a:t>
             </a:r>
           </a:p>
         </p:txBody>
@@ -1573,7 +1573,7 @@
           <a:lstStyle/>
           <a:p>
             <a:r>
-              <a:t>This is the headline. Five rows green = foundation done; three amber = active work the team finishes by May 16; one red = stretch item that may slip into v0.10. The shift from May 8 to May 16 buys time for the multi-provider matrix and the agentic polish — the agent loop core is working today, but we want demo-grade reliability.</a:t>
+              <a:t>This is the headline. Five rows green = foundation done; three amber = active work the team finishes by June 13; one red = stretch item that may slip into v0.10. The honest 6-week timeline (vs the original May 8) reflects the real punch list: provider matrix tests across the full 5 × 4 × 3 × 4 grid, Leiden tuning that needs iteration, observability work that touches every stage, and a recorded demo we want to be able to ship without disclaimers.</a:t>
             </a:r>
           </a:p>
         </p:txBody>
@@ -5107,7 +5107,7 @@
                 </a:solidFill>
                 <a:latin typeface="Helvetica Neue"/>
               </a:rPr>
-              <a:t>Architecture review · platform built · 11 working days to v0.9 release</a:t>
+              <a:t>Architecture review · platform built · 6 working weeks to v0.9 release</a:t>
             </a:r>
           </a:p>
         </p:txBody>
@@ -5142,7 +5142,7 @@
                 </a:solidFill>
                 <a:latin typeface="Helvetica Neue"/>
               </a:rPr>
-              <a:t>Apr 30, 2026  ·  client review  ·  v0.9 release Sat May 16</a:t>
+              <a:t>Apr 30, 2026  ·  client review  ·  v0.9 release Fri June 13</a:t>
             </a:r>
           </a:p>
         </p:txBody>
@@ -8314,7 +8314,7 @@
                 </a:solidFill>
                 <a:latin typeface="Helvetica Neue"/>
               </a:rPr>
-              <a:t>Cross-product regression matrix lands by May 16</a:t>
+              <a:t>Cross-product regression matrix lands by June 13</a:t>
             </a:r>
           </a:p>
         </p:txBody>
@@ -10047,7 +10047,7 @@
                 </a:solidFill>
                 <a:latin typeface="Helvetica Neue"/>
               </a:rPr>
-              <a:t>11 working days of focused polish · then tag and announce</a:t>
+              <a:t>6 working weeks of focused polish · then tag and announce</a:t>
             </a:r>
           </a:p>
         </p:txBody>
@@ -10618,7 +10618,7 @@
                 </a:solidFill>
                 <a:latin typeface="Helvetica Neue"/>
               </a:rPr>
-              <a:t>End-to-end recording on a clean Mac and Windows machine; v0.9 tag pushed Sat May 16; release notes + operator runbook + provider-swap guide finalized.</a:t>
+              <a:t>End-to-end recording on a clean Mac and Windows machine; v0.9 tag pushed Fri June 13; release notes + operator runbook + provider-swap guide finalized.</a:t>
             </a:r>
           </a:p>
         </p:txBody>
@@ -11017,7 +11017,7 @@
                 </a:solidFill>
                 <a:latin typeface="Helvetica Neue"/>
               </a:rPr>
-              <a:t>What we're delivering by Sat May 16</a:t>
+              <a:t>What we're delivering by Fri June 13</a:t>
             </a:r>
           </a:p>
         </p:txBody>
@@ -11251,7 +11251,7 @@
                 </a:solidFill>
                 <a:latin typeface="Helvetica Neue"/>
               </a:rPr>
-              <a:t>Day-by-day plan</a:t>
+              <a:t>Phased plan to v0.9</a:t>
             </a:r>
           </a:p>
         </p:txBody>
@@ -11286,7 +11286,7 @@
                 </a:solidFill>
                 <a:latin typeface="Helvetica Neue"/>
               </a:rPr>
-              <a:t>Apr 30 → Fri May 15 · 11 working days · v0.9 release Sat May 16</a:t>
+              <a:t>Six working weeks · Apr 30 → Fri June 12 · release tag Fri June 13</a:t>
             </a:r>
           </a:p>
         </p:txBody>
@@ -11346,7 +11346,7 @@
         <p:spPr>
           <a:xfrm>
             <a:off x="640080" y="1508760"/>
-            <a:ext cx="1554480" cy="237744"/>
+            <a:ext cx="1097280" cy="237744"/>
           </a:xfrm>
           <a:prstGeom prst="rect">
             <a:avLst/>
@@ -11363,25 +11363,1530 @@
             <a:r>
               <a:rPr sz="1100" b="1">
                 <a:solidFill>
+                  <a:srgbClr val="4AD09C"/>
+                </a:solidFill>
+                <a:latin typeface="Helvetica Neue"/>
+              </a:rPr>
+              <a:t>Week 1</a:t>
+            </a:r>
+          </a:p>
+        </p:txBody>
+      </p:sp>
+      <p:sp>
+        <p:nvSpPr>
+          <p:cNvPr id="6" name="TextBox 5"/>
+          <p:cNvSpPr txBox="1"/>
+          <p:nvPr/>
+        </p:nvSpPr>
+        <p:spPr>
+          <a:xfrm>
+            <a:off x="1783080" y="1508760"/>
+            <a:ext cx="1463040" cy="237744"/>
+          </a:xfrm>
+          <a:prstGeom prst="rect">
+            <a:avLst/>
+          </a:prstGeom>
+          <a:noFill/>
+        </p:spPr>
+        <p:txBody>
+          <a:bodyPr wrap="square" lIns="45720" rIns="45720">
+            <a:spAutoFit/>
+          </a:bodyPr>
+          <a:lstStyle/>
+          <a:p>
+            <a:pPr algn="l"/>
+            <a:r>
+              <a:rPr sz="1000" b="0">
+                <a:solidFill>
+                  <a:srgbClr val="8A95A5"/>
+                </a:solidFill>
+                <a:latin typeface="Helvetica Neue"/>
+              </a:rPr>
+              <a:t>Apr 30 + May 4–8</a:t>
+            </a:r>
+          </a:p>
+        </p:txBody>
+      </p:sp>
+      <p:sp>
+        <p:nvSpPr>
+          <p:cNvPr id="7" name="TextBox 6"/>
+          <p:cNvSpPr txBox="1"/>
+          <p:nvPr/>
+        </p:nvSpPr>
+        <p:spPr>
+          <a:xfrm>
+            <a:off x="3291840" y="1508760"/>
+            <a:ext cx="8412480" cy="237744"/>
+          </a:xfrm>
+          <a:prstGeom prst="rect">
+            <a:avLst/>
+          </a:prstGeom>
+          <a:noFill/>
+        </p:spPr>
+        <p:txBody>
+          <a:bodyPr wrap="square" lIns="45720" rIns="45720">
+            <a:spAutoFit/>
+          </a:bodyPr>
+          <a:lstStyle/>
+          <a:p>
+            <a:pPr algn="l"/>
+            <a:r>
+              <a:rPr sz="1100" b="1">
+                <a:solidFill>
+                  <a:srgbClr val="E6EAF0"/>
+                </a:solidFill>
+                <a:latin typeface="Helvetica Neue"/>
+              </a:rPr>
+              <a:t>Provider matrix + Leiden — kickoff</a:t>
+            </a:r>
+          </a:p>
+        </p:txBody>
+      </p:sp>
+      <p:sp>
+        <p:nvSpPr>
+          <p:cNvPr id="8" name="TextBox 7"/>
+          <p:cNvSpPr txBox="1"/>
+          <p:nvPr/>
+        </p:nvSpPr>
+        <p:spPr>
+          <a:xfrm>
+            <a:off x="3291840" y="1682495"/>
+            <a:ext cx="8412480" cy="201168"/>
+          </a:xfrm>
+          <a:prstGeom prst="rect">
+            <a:avLst/>
+          </a:prstGeom>
+          <a:noFill/>
+        </p:spPr>
+        <p:txBody>
+          <a:bodyPr wrap="square" lIns="45720" rIns="45720">
+            <a:spAutoFit/>
+          </a:bodyPr>
+          <a:lstStyle/>
+          <a:p>
+            <a:pPr algn="l"/>
+            <a:r>
+              <a:rPr sz="900" b="0">
+                <a:solidFill>
+                  <a:srgbClr val="8A95A5"/>
+                </a:solidFill>
+                <a:latin typeface="Helvetica Neue"/>
+              </a:rPr>
+              <a:t>•  Lock matrix shape: 5 LLMs × 4 embeddings × 3 dialects × 4 consumers; CI fixtures</a:t>
+            </a:r>
+          </a:p>
+        </p:txBody>
+      </p:sp>
+      <p:sp>
+        <p:nvSpPr>
+          <p:cNvPr id="9" name="TextBox 8"/>
+          <p:cNvSpPr txBox="1"/>
+          <p:nvPr/>
+        </p:nvSpPr>
+        <p:spPr>
+          <a:xfrm>
+            <a:off x="3291840" y="1856231"/>
+            <a:ext cx="8412480" cy="201168"/>
+          </a:xfrm>
+          <a:prstGeom prst="rect">
+            <a:avLst/>
+          </a:prstGeom>
+          <a:noFill/>
+        </p:spPr>
+        <p:txBody>
+          <a:bodyPr wrap="square" lIns="45720" rIns="45720">
+            <a:spAutoFit/>
+          </a:bodyPr>
+          <a:lstStyle/>
+          <a:p>
+            <a:pPr algn="l"/>
+            <a:r>
+              <a:rPr sz="900" b="0">
+                <a:solidFill>
+                  <a:srgbClr val="8A95A5"/>
+                </a:solidFill>
+                <a:latin typeface="Helvetica Neue"/>
+              </a:rPr>
+              <a:t>•  Run agent + chat against Anthropic, Bedrock first; patch translator gaps</a:t>
+            </a:r>
+          </a:p>
+        </p:txBody>
+      </p:sp>
+      <p:sp>
+        <p:nvSpPr>
+          <p:cNvPr id="10" name="TextBox 9"/>
+          <p:cNvSpPr txBox="1"/>
+          <p:nvPr/>
+        </p:nvSpPr>
+        <p:spPr>
+          <a:xfrm>
+            <a:off x="3291840" y="2029967"/>
+            <a:ext cx="8412480" cy="201168"/>
+          </a:xfrm>
+          <a:prstGeom prst="rect">
+            <a:avLst/>
+          </a:prstGeom>
+          <a:noFill/>
+        </p:spPr>
+        <p:txBody>
+          <a:bodyPr wrap="square" lIns="45720" rIns="45720">
+            <a:spAutoFit/>
+          </a:bodyPr>
+          <a:lstStyle/>
+          <a:p>
+            <a:pPr algn="l"/>
+            <a:r>
+              <a:rPr sz="900" b="0">
+                <a:solidFill>
+                  <a:srgbClr val="8A95A5"/>
+                </a:solidFill>
+                <a:latin typeface="Helvetica Neue"/>
+              </a:rPr>
+              <a:t>•  Spike Leiden auto-clustering on oversize domains (Student / Assessment / Discipline)</a:t>
+            </a:r>
+          </a:p>
+        </p:txBody>
+      </p:sp>
+      <p:sp>
+        <p:nvSpPr>
+          <p:cNvPr id="11" name="TextBox 10"/>
+          <p:cNvSpPr txBox="1"/>
+          <p:nvPr/>
+        </p:nvSpPr>
+        <p:spPr>
+          <a:xfrm>
+            <a:off x="3291840" y="2203703"/>
+            <a:ext cx="8412480" cy="201168"/>
+          </a:xfrm>
+          <a:prstGeom prst="rect">
+            <a:avLst/>
+          </a:prstGeom>
+          <a:noFill/>
+        </p:spPr>
+        <p:txBody>
+          <a:bodyPr wrap="square" lIns="45720" rIns="45720">
+            <a:spAutoFit/>
+          </a:bodyPr>
+          <a:lstStyle/>
+          <a:p>
+            <a:pPr algn="l"/>
+            <a:r>
+              <a:rPr sz="900" b="0">
+                <a:solidFill>
+                  <a:srgbClr val="8A95A5"/>
+                </a:solidFill>
+                <a:latin typeface="Helvetica Neue"/>
+              </a:rPr>
+              <a:t>•  Cluster-ID stability via Hungarian assignment across rebuilds</a:t>
+            </a:r>
+          </a:p>
+        </p:txBody>
+      </p:sp>
+      <p:sp>
+        <p:nvSpPr>
+          <p:cNvPr id="12" name="TextBox 11"/>
+          <p:cNvSpPr txBox="1"/>
+          <p:nvPr/>
+        </p:nvSpPr>
+        <p:spPr>
+          <a:xfrm>
+            <a:off x="640080" y="2350008"/>
+            <a:ext cx="1097280" cy="237744"/>
+          </a:xfrm>
+          <a:prstGeom prst="rect">
+            <a:avLst/>
+          </a:prstGeom>
+          <a:noFill/>
+        </p:spPr>
+        <p:txBody>
+          <a:bodyPr wrap="square" lIns="45720" rIns="45720">
+            <a:spAutoFit/>
+          </a:bodyPr>
+          <a:lstStyle/>
+          <a:p>
+            <a:pPr algn="l"/>
+            <a:r>
+              <a:rPr sz="1100" b="1">
+                <a:solidFill>
+                  <a:srgbClr val="4AD09C"/>
+                </a:solidFill>
+                <a:latin typeface="Helvetica Neue"/>
+              </a:rPr>
+              <a:t>Week 2</a:t>
+            </a:r>
+          </a:p>
+        </p:txBody>
+      </p:sp>
+      <p:sp>
+        <p:nvSpPr>
+          <p:cNvPr id="13" name="TextBox 12"/>
+          <p:cNvSpPr txBox="1"/>
+          <p:nvPr/>
+        </p:nvSpPr>
+        <p:spPr>
+          <a:xfrm>
+            <a:off x="1783080" y="2350008"/>
+            <a:ext cx="1463040" cy="237744"/>
+          </a:xfrm>
+          <a:prstGeom prst="rect">
+            <a:avLst/>
+          </a:prstGeom>
+          <a:noFill/>
+        </p:spPr>
+        <p:txBody>
+          <a:bodyPr wrap="square" lIns="45720" rIns="45720">
+            <a:spAutoFit/>
+          </a:bodyPr>
+          <a:lstStyle/>
+          <a:p>
+            <a:pPr algn="l"/>
+            <a:r>
+              <a:rPr sz="1000" b="0">
+                <a:solidFill>
+                  <a:srgbClr val="8A95A5"/>
+                </a:solidFill>
+                <a:latin typeface="Helvetica Neue"/>
+              </a:rPr>
+              <a:t>May 11–15</a:t>
+            </a:r>
+          </a:p>
+        </p:txBody>
+      </p:sp>
+      <p:sp>
+        <p:nvSpPr>
+          <p:cNvPr id="14" name="TextBox 13"/>
+          <p:cNvSpPr txBox="1"/>
+          <p:nvPr/>
+        </p:nvSpPr>
+        <p:spPr>
+          <a:xfrm>
+            <a:off x="3291840" y="2350008"/>
+            <a:ext cx="8412480" cy="237744"/>
+          </a:xfrm>
+          <a:prstGeom prst="rect">
+            <a:avLst/>
+          </a:prstGeom>
+          <a:noFill/>
+        </p:spPr>
+        <p:txBody>
+          <a:bodyPr wrap="square" lIns="45720" rIns="45720">
+            <a:spAutoFit/>
+          </a:bodyPr>
+          <a:lstStyle/>
+          <a:p>
+            <a:pPr algn="l"/>
+            <a:r>
+              <a:rPr sz="1100" b="1">
+                <a:solidFill>
+                  <a:srgbClr val="E6EAF0"/>
+                </a:solidFill>
+                <a:latin typeface="Helvetica Neue"/>
+              </a:rPr>
+              <a:t>Provider matrix coverage + agentic polish</a:t>
+            </a:r>
+          </a:p>
+        </p:txBody>
+      </p:sp>
+      <p:sp>
+        <p:nvSpPr>
+          <p:cNvPr id="15" name="TextBox 14"/>
+          <p:cNvSpPr txBox="1"/>
+          <p:nvPr/>
+        </p:nvSpPr>
+        <p:spPr>
+          <a:xfrm>
+            <a:off x="3291840" y="2523744"/>
+            <a:ext cx="8412480" cy="201168"/>
+          </a:xfrm>
+          <a:prstGeom prst="rect">
+            <a:avLst/>
+          </a:prstGeom>
+          <a:noFill/>
+        </p:spPr>
+        <p:txBody>
+          <a:bodyPr wrap="square" lIns="45720" rIns="45720">
+            <a:spAutoFit/>
+          </a:bodyPr>
+          <a:lstStyle/>
+          <a:p>
+            <a:pPr algn="l"/>
+            <a:r>
+              <a:rPr sz="900" b="0">
+                <a:solidFill>
+                  <a:srgbClr val="8A95A5"/>
+                </a:solidFill>
+                <a:latin typeface="Helvetica Neue"/>
+              </a:rPr>
+              <a:t>•  Add Azure OpenAI, OpenAI, OpenRouter to the matrix; capture per-provider regressions</a:t>
+            </a:r>
+          </a:p>
+        </p:txBody>
+      </p:sp>
+      <p:sp>
+        <p:nvSpPr>
+          <p:cNvPr id="16" name="TextBox 15"/>
+          <p:cNvSpPr txBox="1"/>
+          <p:nvPr/>
+        </p:nvSpPr>
+        <p:spPr>
+          <a:xfrm>
+            <a:off x="3291840" y="2697479"/>
+            <a:ext cx="8412480" cy="201168"/>
+          </a:xfrm>
+          <a:prstGeom prst="rect">
+            <a:avLst/>
+          </a:prstGeom>
+          <a:noFill/>
+        </p:spPr>
+        <p:txBody>
+          <a:bodyPr wrap="square" lIns="45720" rIns="45720">
+            <a:spAutoFit/>
+          </a:bodyPr>
+          <a:lstStyle/>
+          <a:p>
+            <a:pPr algn="l"/>
+            <a:r>
+              <a:rPr sz="900" b="0">
+                <a:solidFill>
+                  <a:srgbClr val="8A95A5"/>
+                </a:solidFill>
+                <a:latin typeface="Helvetica Neue"/>
+              </a:rPr>
+              <a:t>•  Tool-call retries + structured failure surfaces in the agent loop</a:t>
+            </a:r>
+          </a:p>
+        </p:txBody>
+      </p:sp>
+      <p:sp>
+        <p:nvSpPr>
+          <p:cNvPr id="17" name="TextBox 16"/>
+          <p:cNvSpPr txBox="1"/>
+          <p:nvPr/>
+        </p:nvSpPr>
+        <p:spPr>
+          <a:xfrm>
+            <a:off x="3291840" y="2871215"/>
+            <a:ext cx="8412480" cy="201168"/>
+          </a:xfrm>
+          <a:prstGeom prst="rect">
+            <a:avLst/>
+          </a:prstGeom>
+          <a:noFill/>
+        </p:spPr>
+        <p:txBody>
+          <a:bodyPr wrap="square" lIns="45720" rIns="45720">
+            <a:spAutoFit/>
+          </a:bodyPr>
+          <a:lstStyle/>
+          <a:p>
+            <a:pPr algn="l"/>
+            <a:r>
+              <a:rPr sz="900" b="0">
+                <a:solidFill>
+                  <a:srgbClr val="8A95A5"/>
+                </a:solidFill>
+                <a:latin typeface="Helvetica Neue"/>
+              </a:rPr>
+              <a:t>•  New agent tools: chart export, eval drilldown, conversation rename / archive</a:t>
+            </a:r>
+          </a:p>
+        </p:txBody>
+      </p:sp>
+      <p:sp>
+        <p:nvSpPr>
+          <p:cNvPr id="18" name="TextBox 17"/>
+          <p:cNvSpPr txBox="1"/>
+          <p:nvPr/>
+        </p:nvSpPr>
+        <p:spPr>
+          <a:xfrm>
+            <a:off x="3291840" y="3044951"/>
+            <a:ext cx="8412480" cy="201168"/>
+          </a:xfrm>
+          <a:prstGeom prst="rect">
+            <a:avLst/>
+          </a:prstGeom>
+          <a:noFill/>
+        </p:spPr>
+        <p:txBody>
+          <a:bodyPr wrap="square" lIns="45720" rIns="45720">
+            <a:spAutoFit/>
+          </a:bodyPr>
+          <a:lstStyle/>
+          <a:p>
+            <a:pPr algn="l"/>
+            <a:r>
+              <a:rPr sz="900" b="0">
+                <a:solidFill>
+                  <a:srgbClr val="8A95A5"/>
+                </a:solidFill>
+                <a:latin typeface="Helvetica Neue"/>
+              </a:rPr>
+              <a:t>•  Streaming UX polish — token-level feedback under flaky network conditions</a:t>
+            </a:r>
+          </a:p>
+        </p:txBody>
+      </p:sp>
+      <p:sp>
+        <p:nvSpPr>
+          <p:cNvPr id="19" name="TextBox 18"/>
+          <p:cNvSpPr txBox="1"/>
+          <p:nvPr/>
+        </p:nvSpPr>
+        <p:spPr>
+          <a:xfrm>
+            <a:off x="640080" y="3191256"/>
+            <a:ext cx="1097280" cy="237744"/>
+          </a:xfrm>
+          <a:prstGeom prst="rect">
+            <a:avLst/>
+          </a:prstGeom>
+          <a:noFill/>
+        </p:spPr>
+        <p:txBody>
+          <a:bodyPr wrap="square" lIns="45720" rIns="45720">
+            <a:spAutoFit/>
+          </a:bodyPr>
+          <a:lstStyle/>
+          <a:p>
+            <a:pPr algn="l"/>
+            <a:r>
+              <a:rPr sz="1100" b="1">
+                <a:solidFill>
+                  <a:srgbClr val="F2B857"/>
+                </a:solidFill>
+                <a:latin typeface="Helvetica Neue"/>
+              </a:rPr>
+              <a:t>Week 3</a:t>
+            </a:r>
+          </a:p>
+        </p:txBody>
+      </p:sp>
+      <p:sp>
+        <p:nvSpPr>
+          <p:cNvPr id="20" name="TextBox 19"/>
+          <p:cNvSpPr txBox="1"/>
+          <p:nvPr/>
+        </p:nvSpPr>
+        <p:spPr>
+          <a:xfrm>
+            <a:off x="1783080" y="3191256"/>
+            <a:ext cx="1463040" cy="237744"/>
+          </a:xfrm>
+          <a:prstGeom prst="rect">
+            <a:avLst/>
+          </a:prstGeom>
+          <a:noFill/>
+        </p:spPr>
+        <p:txBody>
+          <a:bodyPr wrap="square" lIns="45720" rIns="45720">
+            <a:spAutoFit/>
+          </a:bodyPr>
+          <a:lstStyle/>
+          <a:p>
+            <a:pPr algn="l"/>
+            <a:r>
+              <a:rPr sz="1000" b="0">
+                <a:solidFill>
+                  <a:srgbClr val="8A95A5"/>
+                </a:solidFill>
+                <a:latin typeface="Helvetica Neue"/>
+              </a:rPr>
+              <a:t>May 18–22</a:t>
+            </a:r>
+          </a:p>
+        </p:txBody>
+      </p:sp>
+      <p:sp>
+        <p:nvSpPr>
+          <p:cNvPr id="21" name="TextBox 20"/>
+          <p:cNvSpPr txBox="1"/>
+          <p:nvPr/>
+        </p:nvSpPr>
+        <p:spPr>
+          <a:xfrm>
+            <a:off x="3291840" y="3191256"/>
+            <a:ext cx="8412480" cy="237744"/>
+          </a:xfrm>
+          <a:prstGeom prst="rect">
+            <a:avLst/>
+          </a:prstGeom>
+          <a:noFill/>
+        </p:spPr>
+        <p:txBody>
+          <a:bodyPr wrap="square" lIns="45720" rIns="45720">
+            <a:spAutoFit/>
+          </a:bodyPr>
+          <a:lstStyle/>
+          <a:p>
+            <a:pPr algn="l"/>
+            <a:r>
+              <a:rPr sz="1100" b="1">
+                <a:solidFill>
+                  <a:srgbClr val="E6EAF0"/>
+                </a:solidFill>
+                <a:latin typeface="Helvetica Neue"/>
+              </a:rPr>
+              <a:t>Observability scaffolding</a:t>
+            </a:r>
+          </a:p>
+        </p:txBody>
+      </p:sp>
+      <p:sp>
+        <p:nvSpPr>
+          <p:cNvPr id="22" name="TextBox 21"/>
+          <p:cNvSpPr txBox="1"/>
+          <p:nvPr/>
+        </p:nvSpPr>
+        <p:spPr>
+          <a:xfrm>
+            <a:off x="3291840" y="3364991"/>
+            <a:ext cx="8412480" cy="201168"/>
+          </a:xfrm>
+          <a:prstGeom prst="rect">
+            <a:avLst/>
+          </a:prstGeom>
+          <a:noFill/>
+        </p:spPr>
+        <p:txBody>
+          <a:bodyPr wrap="square" lIns="45720" rIns="45720">
+            <a:spAutoFit/>
+          </a:bodyPr>
+          <a:lstStyle/>
+          <a:p>
+            <a:pPr algn="l"/>
+            <a:r>
+              <a:rPr sz="900" b="0">
+                <a:solidFill>
+                  <a:srgbClr val="8A95A5"/>
+                </a:solidFill>
+                <a:latin typeface="Helvetica Neue"/>
+              </a:rPr>
+              <a:t>•  OpenTelemetry spans on every pipeline + agent stage; correlation IDs across services</a:t>
+            </a:r>
+          </a:p>
+        </p:txBody>
+      </p:sp>
+      <p:sp>
+        <p:nvSpPr>
+          <p:cNvPr id="23" name="TextBox 22"/>
+          <p:cNvSpPr txBox="1"/>
+          <p:nvPr/>
+        </p:nvSpPr>
+        <p:spPr>
+          <a:xfrm>
+            <a:off x="3291840" y="3538727"/>
+            <a:ext cx="8412480" cy="201168"/>
+          </a:xfrm>
+          <a:prstGeom prst="rect">
+            <a:avLst/>
+          </a:prstGeom>
+          <a:noFill/>
+        </p:spPr>
+        <p:txBody>
+          <a:bodyPr wrap="square" lIns="45720" rIns="45720">
+            <a:spAutoFit/>
+          </a:bodyPr>
+          <a:lstStyle/>
+          <a:p>
+            <a:pPr algn="l"/>
+            <a:r>
+              <a:rPr sz="900" b="0">
+                <a:solidFill>
+                  <a:srgbClr val="8A95A5"/>
+                </a:solidFill>
+                <a:latin typeface="Helvetica Neue"/>
+              </a:rPr>
+              <a:t>•  Prometheus counters / histograms; Grafana dashboards in infra/grafana/</a:t>
+            </a:r>
+          </a:p>
+        </p:txBody>
+      </p:sp>
+      <p:sp>
+        <p:nvSpPr>
+          <p:cNvPr id="24" name="TextBox 23"/>
+          <p:cNvSpPr txBox="1"/>
+          <p:nvPr/>
+        </p:nvSpPr>
+        <p:spPr>
+          <a:xfrm>
+            <a:off x="3291840" y="3712463"/>
+            <a:ext cx="8412480" cy="201168"/>
+          </a:xfrm>
+          <a:prstGeom prst="rect">
+            <a:avLst/>
+          </a:prstGeom>
+          <a:noFill/>
+        </p:spPr>
+        <p:txBody>
+          <a:bodyPr wrap="square" lIns="45720" rIns="45720">
+            <a:spAutoFit/>
+          </a:bodyPr>
+          <a:lstStyle/>
+          <a:p>
+            <a:pPr algn="l"/>
+            <a:r>
+              <a:rPr sz="900" b="0">
+                <a:solidFill>
+                  <a:srgbClr val="8A95A5"/>
+                </a:solidFill>
+                <a:latin typeface="Helvetica Neue"/>
+              </a:rPr>
+              <a:t>•  Structured logging context: request_id, provider, dialect, conversation_id</a:t>
+            </a:r>
+          </a:p>
+        </p:txBody>
+      </p:sp>
+      <p:sp>
+        <p:nvSpPr>
+          <p:cNvPr id="25" name="TextBox 24"/>
+          <p:cNvSpPr txBox="1"/>
+          <p:nvPr/>
+        </p:nvSpPr>
+        <p:spPr>
+          <a:xfrm>
+            <a:off x="3291840" y="3886200"/>
+            <a:ext cx="8412480" cy="201168"/>
+          </a:xfrm>
+          <a:prstGeom prst="rect">
+            <a:avLst/>
+          </a:prstGeom>
+          <a:noFill/>
+        </p:spPr>
+        <p:txBody>
+          <a:bodyPr wrap="square" lIns="45720" rIns="45720">
+            <a:spAutoFit/>
+          </a:bodyPr>
+          <a:lstStyle/>
+          <a:p>
+            <a:pPr algn="l"/>
+            <a:r>
+              <a:rPr sz="900" b="0">
+                <a:solidFill>
+                  <a:srgbClr val="8A95A5"/>
+                </a:solidFill>
+                <a:latin typeface="Helvetica Neue"/>
+              </a:rPr>
+              <a:t>•  Stretch — slips to v0.10 without affecting the demo if the matrix runs long</a:t>
+            </a:r>
+          </a:p>
+        </p:txBody>
+      </p:sp>
+      <p:sp>
+        <p:nvSpPr>
+          <p:cNvPr id="26" name="TextBox 25"/>
+          <p:cNvSpPr txBox="1"/>
+          <p:nvPr/>
+        </p:nvSpPr>
+        <p:spPr>
+          <a:xfrm>
+            <a:off x="640080" y="4032504"/>
+            <a:ext cx="1097280" cy="237744"/>
+          </a:xfrm>
+          <a:prstGeom prst="rect">
+            <a:avLst/>
+          </a:prstGeom>
+          <a:noFill/>
+        </p:spPr>
+        <p:txBody>
+          <a:bodyPr wrap="square" lIns="45720" rIns="45720">
+            <a:spAutoFit/>
+          </a:bodyPr>
+          <a:lstStyle/>
+          <a:p>
+            <a:pPr algn="l"/>
+            <a:r>
+              <a:rPr sz="1100" b="1">
+                <a:solidFill>
+                  <a:srgbClr val="4AD09C"/>
+                </a:solidFill>
+                <a:latin typeface="Helvetica Neue"/>
+              </a:rPr>
+              <a:t>Week 4</a:t>
+            </a:r>
+          </a:p>
+        </p:txBody>
+      </p:sp>
+      <p:sp>
+        <p:nvSpPr>
+          <p:cNvPr id="27" name="TextBox 26"/>
+          <p:cNvSpPr txBox="1"/>
+          <p:nvPr/>
+        </p:nvSpPr>
+        <p:spPr>
+          <a:xfrm>
+            <a:off x="1783080" y="4032504"/>
+            <a:ext cx="1463040" cy="237744"/>
+          </a:xfrm>
+          <a:prstGeom prst="rect">
+            <a:avLst/>
+          </a:prstGeom>
+          <a:noFill/>
+        </p:spPr>
+        <p:txBody>
+          <a:bodyPr wrap="square" lIns="45720" rIns="45720">
+            <a:spAutoFit/>
+          </a:bodyPr>
+          <a:lstStyle/>
+          <a:p>
+            <a:pPr algn="l"/>
+            <a:r>
+              <a:rPr sz="1000" b="0">
+                <a:solidFill>
+                  <a:srgbClr val="8A95A5"/>
+                </a:solidFill>
+                <a:latin typeface="Helvetica Neue"/>
+              </a:rPr>
+              <a:t>May 25–29</a:t>
+            </a:r>
+          </a:p>
+        </p:txBody>
+      </p:sp>
+      <p:sp>
+        <p:nvSpPr>
+          <p:cNvPr id="28" name="TextBox 27"/>
+          <p:cNvSpPr txBox="1"/>
+          <p:nvPr/>
+        </p:nvSpPr>
+        <p:spPr>
+          <a:xfrm>
+            <a:off x="3291840" y="4032504"/>
+            <a:ext cx="8412480" cy="237744"/>
+          </a:xfrm>
+          <a:prstGeom prst="rect">
+            <a:avLst/>
+          </a:prstGeom>
+          <a:noFill/>
+        </p:spPr>
+        <p:txBody>
+          <a:bodyPr wrap="square" lIns="45720" rIns="45720">
+            <a:spAutoFit/>
+          </a:bodyPr>
+          <a:lstStyle/>
+          <a:p>
+            <a:pPr algn="l"/>
+            <a:r>
+              <a:rPr sz="1100" b="1">
+                <a:solidFill>
+                  <a:srgbClr val="E6EAF0"/>
+                </a:solidFill>
+                <a:latin typeface="Helvetica Neue"/>
+              </a:rPr>
+              <a:t>Performance pass + eval suite expansion</a:t>
+            </a:r>
+          </a:p>
+        </p:txBody>
+      </p:sp>
+      <p:sp>
+        <p:nvSpPr>
+          <p:cNvPr id="29" name="TextBox 28"/>
+          <p:cNvSpPr txBox="1"/>
+          <p:nvPr/>
+        </p:nvSpPr>
+        <p:spPr>
+          <a:xfrm>
+            <a:off x="3291840" y="4206240"/>
+            <a:ext cx="8412480" cy="201168"/>
+          </a:xfrm>
+          <a:prstGeom prst="rect">
+            <a:avLst/>
+          </a:prstGeom>
+          <a:noFill/>
+        </p:spPr>
+        <p:txBody>
+          <a:bodyPr wrap="square" lIns="45720" rIns="45720">
+            <a:spAutoFit/>
+          </a:bodyPr>
+          <a:lstStyle/>
+          <a:p>
+            <a:pPr algn="l"/>
+            <a:r>
+              <a:rPr sz="900" b="0">
+                <a:solidFill>
+                  <a:srgbClr val="8A95A5"/>
+                </a:solidFill>
+                <a:latin typeface="Helvetica Neue"/>
+              </a:rPr>
+              <a:t>•  Cache hot paths: APSP load, retrieval, gold-store ANN; meet p50/p95 budget</a:t>
+            </a:r>
+          </a:p>
+        </p:txBody>
+      </p:sp>
+      <p:sp>
+        <p:nvSpPr>
+          <p:cNvPr id="30" name="TextBox 29"/>
+          <p:cNvSpPr txBox="1"/>
+          <p:nvPr/>
+        </p:nvSpPr>
+        <p:spPr>
+          <a:xfrm>
+            <a:off x="3291840" y="4379976"/>
+            <a:ext cx="8412480" cy="201168"/>
+          </a:xfrm>
+          <a:prstGeom prst="rect">
+            <a:avLst/>
+          </a:prstGeom>
+          <a:noFill/>
+        </p:spPr>
+        <p:txBody>
+          <a:bodyPr wrap="square" lIns="45720" rIns="45720">
+            <a:spAutoFit/>
+          </a:bodyPr>
+          <a:lstStyle/>
+          <a:p>
+            <a:pPr algn="l"/>
+            <a:r>
+              <a:rPr sz="900" b="0">
+                <a:solidFill>
+                  <a:srgbClr val="8A95A5"/>
+                </a:solidFill>
+                <a:latin typeface="Helvetica Neue"/>
+              </a:rPr>
+              <a:t>•  Per-user quota + rate limits; secret-leak scrubber on every error path</a:t>
+            </a:r>
+          </a:p>
+        </p:txBody>
+      </p:sp>
+      <p:sp>
+        <p:nvSpPr>
+          <p:cNvPr id="31" name="TextBox 30"/>
+          <p:cNvSpPr txBox="1"/>
+          <p:nvPr/>
+        </p:nvSpPr>
+        <p:spPr>
+          <a:xfrm>
+            <a:off x="3291840" y="4553712"/>
+            <a:ext cx="8412480" cy="201168"/>
+          </a:xfrm>
+          <a:prstGeom prst="rect">
+            <a:avLst/>
+          </a:prstGeom>
+          <a:noFill/>
+        </p:spPr>
+        <p:txBody>
+          <a:bodyPr wrap="square" lIns="45720" rIns="45720">
+            <a:spAutoFit/>
+          </a:bodyPr>
+          <a:lstStyle/>
+          <a:p>
+            <a:pPr algn="l"/>
+            <a:r>
+              <a:rPr sz="900" b="0">
+                <a:solidFill>
+                  <a:srgbClr val="8A95A5"/>
+                </a:solidFill>
+                <a:latin typeface="Helvetica Neue"/>
+              </a:rPr>
+              <a:t>•  Expand gold-query suite from 50 → 100 questions; wire nightly CI gate</a:t>
+            </a:r>
+          </a:p>
+        </p:txBody>
+      </p:sp>
+      <p:sp>
+        <p:nvSpPr>
+          <p:cNvPr id="32" name="TextBox 31"/>
+          <p:cNvSpPr txBox="1"/>
+          <p:nvPr/>
+        </p:nvSpPr>
+        <p:spPr>
+          <a:xfrm>
+            <a:off x="3291840" y="4727448"/>
+            <a:ext cx="8412480" cy="201168"/>
+          </a:xfrm>
+          <a:prstGeom prst="rect">
+            <a:avLst/>
+          </a:prstGeom>
+          <a:noFill/>
+        </p:spPr>
+        <p:txBody>
+          <a:bodyPr wrap="square" lIns="45720" rIns="45720">
+            <a:spAutoFit/>
+          </a:bodyPr>
+          <a:lstStyle/>
+          <a:p>
+            <a:pPr algn="l"/>
+            <a:r>
+              <a:rPr sz="900" b="0">
+                <a:solidFill>
+                  <a:srgbClr val="8A95A5"/>
+                </a:solidFill>
+                <a:latin typeface="Helvetica Neue"/>
+              </a:rPr>
+              <a:t>•  Eval Dashboard polish — per-build deltas, regression alerts, drilldown</a:t>
+            </a:r>
+          </a:p>
+        </p:txBody>
+      </p:sp>
+      <p:sp>
+        <p:nvSpPr>
+          <p:cNvPr id="33" name="TextBox 32"/>
+          <p:cNvSpPr txBox="1"/>
+          <p:nvPr/>
+        </p:nvSpPr>
+        <p:spPr>
+          <a:xfrm>
+            <a:off x="640080" y="4873752"/>
+            <a:ext cx="1097280" cy="237744"/>
+          </a:xfrm>
+          <a:prstGeom prst="rect">
+            <a:avLst/>
+          </a:prstGeom>
+          <a:noFill/>
+        </p:spPr>
+        <p:txBody>
+          <a:bodyPr wrap="square" lIns="45720" rIns="45720">
+            <a:spAutoFit/>
+          </a:bodyPr>
+          <a:lstStyle/>
+          <a:p>
+            <a:pPr algn="l"/>
+            <a:r>
+              <a:rPr sz="1100" b="1">
+                <a:solidFill>
+                  <a:srgbClr val="4AD09C"/>
+                </a:solidFill>
+                <a:latin typeface="Helvetica Neue"/>
+              </a:rPr>
+              <a:t>Week 5</a:t>
+            </a:r>
+          </a:p>
+        </p:txBody>
+      </p:sp>
+      <p:sp>
+        <p:nvSpPr>
+          <p:cNvPr id="34" name="TextBox 33"/>
+          <p:cNvSpPr txBox="1"/>
+          <p:nvPr/>
+        </p:nvSpPr>
+        <p:spPr>
+          <a:xfrm>
+            <a:off x="1783080" y="4873752"/>
+            <a:ext cx="1463040" cy="237744"/>
+          </a:xfrm>
+          <a:prstGeom prst="rect">
+            <a:avLst/>
+          </a:prstGeom>
+          <a:noFill/>
+        </p:spPr>
+        <p:txBody>
+          <a:bodyPr wrap="square" lIns="45720" rIns="45720">
+            <a:spAutoFit/>
+          </a:bodyPr>
+          <a:lstStyle/>
+          <a:p>
+            <a:pPr algn="l"/>
+            <a:r>
+              <a:rPr sz="1000" b="0">
+                <a:solidFill>
+                  <a:srgbClr val="8A95A5"/>
+                </a:solidFill>
+                <a:latin typeface="Helvetica Neue"/>
+              </a:rPr>
+              <a:t>Jun 1–5</a:t>
+            </a:r>
+          </a:p>
+        </p:txBody>
+      </p:sp>
+      <p:sp>
+        <p:nvSpPr>
+          <p:cNvPr id="35" name="TextBox 34"/>
+          <p:cNvSpPr txBox="1"/>
+          <p:nvPr/>
+        </p:nvSpPr>
+        <p:spPr>
+          <a:xfrm>
+            <a:off x="3291840" y="4873752"/>
+            <a:ext cx="8412480" cy="237744"/>
+          </a:xfrm>
+          <a:prstGeom prst="rect">
+            <a:avLst/>
+          </a:prstGeom>
+          <a:noFill/>
+        </p:spPr>
+        <p:txBody>
+          <a:bodyPr wrap="square" lIns="45720" rIns="45720">
+            <a:spAutoFit/>
+          </a:bodyPr>
+          <a:lstStyle/>
+          <a:p>
+            <a:pPr algn="l"/>
+            <a:r>
+              <a:rPr sz="1100" b="1">
+                <a:solidFill>
+                  <a:srgbClr val="E6EAF0"/>
+                </a:solidFill>
+                <a:latin typeface="Helvetica Neue"/>
+              </a:rPr>
+              <a:t>Cross-platform smoke + documentation</a:t>
+            </a:r>
+          </a:p>
+        </p:txBody>
+      </p:sp>
+      <p:sp>
+        <p:nvSpPr>
+          <p:cNvPr id="36" name="TextBox 35"/>
+          <p:cNvSpPr txBox="1"/>
+          <p:nvPr/>
+        </p:nvSpPr>
+        <p:spPr>
+          <a:xfrm>
+            <a:off x="3291840" y="5047488"/>
+            <a:ext cx="8412480" cy="201168"/>
+          </a:xfrm>
+          <a:prstGeom prst="rect">
+            <a:avLst/>
+          </a:prstGeom>
+          <a:noFill/>
+        </p:spPr>
+        <p:txBody>
+          <a:bodyPr wrap="square" lIns="45720" rIns="45720">
+            <a:spAutoFit/>
+          </a:bodyPr>
+          <a:lstStyle/>
+          <a:p>
+            <a:pPr algn="l"/>
+            <a:r>
+              <a:rPr sz="900" b="0">
+                <a:solidFill>
+                  <a:srgbClr val="8A95A5"/>
+                </a:solidFill>
+                <a:latin typeface="Helvetica Neue"/>
+              </a:rPr>
+              <a:t>•  Clean Windows 11 + macOS dry runs from git clone; capture install-time issues</a:t>
+            </a:r>
+          </a:p>
+        </p:txBody>
+      </p:sp>
+      <p:sp>
+        <p:nvSpPr>
+          <p:cNvPr id="37" name="TextBox 36"/>
+          <p:cNvSpPr txBox="1"/>
+          <p:nvPr/>
+        </p:nvSpPr>
+        <p:spPr>
+          <a:xfrm>
+            <a:off x="3291840" y="5221224"/>
+            <a:ext cx="8412480" cy="201168"/>
+          </a:xfrm>
+          <a:prstGeom prst="rect">
+            <a:avLst/>
+          </a:prstGeom>
+          <a:noFill/>
+        </p:spPr>
+        <p:txBody>
+          <a:bodyPr wrap="square" lIns="45720" rIns="45720">
+            <a:spAutoFit/>
+          </a:bodyPr>
+          <a:lstStyle/>
+          <a:p>
+            <a:pPr algn="l"/>
+            <a:r>
+              <a:rPr sz="900" b="0">
+                <a:solidFill>
+                  <a:srgbClr val="8A95A5"/>
+                </a:solidFill>
+                <a:latin typeface="Helvetica Neue"/>
+              </a:rPr>
+              <a:t>•  Provider-swap drill: Anthropic → Bedrock → Azure mid-session without restart</a:t>
+            </a:r>
+          </a:p>
+        </p:txBody>
+      </p:sp>
+      <p:sp>
+        <p:nvSpPr>
+          <p:cNvPr id="38" name="TextBox 37"/>
+          <p:cNvSpPr txBox="1"/>
+          <p:nvPr/>
+        </p:nvSpPr>
+        <p:spPr>
+          <a:xfrm>
+            <a:off x="3291840" y="5394960"/>
+            <a:ext cx="8412480" cy="201168"/>
+          </a:xfrm>
+          <a:prstGeom prst="rect">
+            <a:avLst/>
+          </a:prstGeom>
+          <a:noFill/>
+        </p:spPr>
+        <p:txBody>
+          <a:bodyPr wrap="square" lIns="45720" rIns="45720">
+            <a:spAutoFit/>
+          </a:bodyPr>
+          <a:lstStyle/>
+          <a:p>
+            <a:pPr algn="l"/>
+            <a:r>
+              <a:rPr sz="900" b="0">
+                <a:solidFill>
+                  <a:srgbClr val="8A95A5"/>
+                </a:solidFill>
+                <a:latin typeface="Helvetica Neue"/>
+              </a:rPr>
+              <a:t>•  Operator runbook, provider-swap guide, gold-curation guide — all finalized</a:t>
+            </a:r>
+          </a:p>
+        </p:txBody>
+      </p:sp>
+      <p:sp>
+        <p:nvSpPr>
+          <p:cNvPr id="39" name="TextBox 38"/>
+          <p:cNvSpPr txBox="1"/>
+          <p:nvPr/>
+        </p:nvSpPr>
+        <p:spPr>
+          <a:xfrm>
+            <a:off x="3291840" y="5568696"/>
+            <a:ext cx="8412480" cy="201168"/>
+          </a:xfrm>
+          <a:prstGeom prst="rect">
+            <a:avLst/>
+          </a:prstGeom>
+          <a:noFill/>
+        </p:spPr>
+        <p:txBody>
+          <a:bodyPr wrap="square" lIns="45720" rIns="45720">
+            <a:spAutoFit/>
+          </a:bodyPr>
+          <a:lstStyle/>
+          <a:p>
+            <a:pPr algn="l"/>
+            <a:r>
+              <a:rPr sz="900" b="0">
+                <a:solidFill>
+                  <a:srgbClr val="8A95A5"/>
+                </a:solidFill>
+                <a:latin typeface="Helvetica Neue"/>
+              </a:rPr>
+              <a:t>•  Release notes draft against the v0.9 candidate</a:t>
+            </a:r>
+          </a:p>
+        </p:txBody>
+      </p:sp>
+      <p:sp>
+        <p:nvSpPr>
+          <p:cNvPr id="40" name="TextBox 39"/>
+          <p:cNvSpPr txBox="1"/>
+          <p:nvPr/>
+        </p:nvSpPr>
+        <p:spPr>
+          <a:xfrm>
+            <a:off x="640080" y="5715000"/>
+            <a:ext cx="1097280" cy="237744"/>
+          </a:xfrm>
+          <a:prstGeom prst="rect">
+            <a:avLst/>
+          </a:prstGeom>
+          <a:noFill/>
+        </p:spPr>
+        <p:txBody>
+          <a:bodyPr wrap="square" lIns="45720" rIns="45720">
+            <a:spAutoFit/>
+          </a:bodyPr>
+          <a:lstStyle/>
+          <a:p>
+            <a:pPr algn="l"/>
+            <a:r>
+              <a:rPr sz="1100" b="1">
+                <a:solidFill>
+                  <a:srgbClr val="4AD09C"/>
+                </a:solidFill>
+                <a:latin typeface="Helvetica Neue"/>
+              </a:rPr>
+              <a:t>Week 6</a:t>
+            </a:r>
+          </a:p>
+        </p:txBody>
+      </p:sp>
+      <p:sp>
+        <p:nvSpPr>
+          <p:cNvPr id="41" name="TextBox 40"/>
+          <p:cNvSpPr txBox="1"/>
+          <p:nvPr/>
+        </p:nvSpPr>
+        <p:spPr>
+          <a:xfrm>
+            <a:off x="1783080" y="5715000"/>
+            <a:ext cx="1463040" cy="237744"/>
+          </a:xfrm>
+          <a:prstGeom prst="rect">
+            <a:avLst/>
+          </a:prstGeom>
+          <a:noFill/>
+        </p:spPr>
+        <p:txBody>
+          <a:bodyPr wrap="square" lIns="45720" rIns="45720">
+            <a:spAutoFit/>
+          </a:bodyPr>
+          <a:lstStyle/>
+          <a:p>
+            <a:pPr algn="l"/>
+            <a:r>
+              <a:rPr sz="1000" b="0">
+                <a:solidFill>
+                  <a:srgbClr val="8A95A5"/>
+                </a:solidFill>
+                <a:latin typeface="Helvetica Neue"/>
+              </a:rPr>
+              <a:t>Jun 8–12</a:t>
+            </a:r>
+          </a:p>
+        </p:txBody>
+      </p:sp>
+      <p:sp>
+        <p:nvSpPr>
+          <p:cNvPr id="42" name="TextBox 41"/>
+          <p:cNvSpPr txBox="1"/>
+          <p:nvPr/>
+        </p:nvSpPr>
+        <p:spPr>
+          <a:xfrm>
+            <a:off x="3291840" y="5715000"/>
+            <a:ext cx="8412480" cy="237744"/>
+          </a:xfrm>
+          <a:prstGeom prst="rect">
+            <a:avLst/>
+          </a:prstGeom>
+          <a:noFill/>
+        </p:spPr>
+        <p:txBody>
+          <a:bodyPr wrap="square" lIns="45720" rIns="45720">
+            <a:spAutoFit/>
+          </a:bodyPr>
+          <a:lstStyle/>
+          <a:p>
+            <a:pPr algn="l"/>
+            <a:r>
+              <a:rPr sz="1100" b="1">
+                <a:solidFill>
+                  <a:srgbClr val="E6EAF0"/>
+                </a:solidFill>
+                <a:latin typeface="Helvetica Neue"/>
+              </a:rPr>
+              <a:t>Recorded demo + release prep</a:t>
+            </a:r>
+          </a:p>
+        </p:txBody>
+      </p:sp>
+      <p:sp>
+        <p:nvSpPr>
+          <p:cNvPr id="43" name="TextBox 42"/>
+          <p:cNvSpPr txBox="1"/>
+          <p:nvPr/>
+        </p:nvSpPr>
+        <p:spPr>
+          <a:xfrm>
+            <a:off x="3291840" y="5888736"/>
+            <a:ext cx="8412480" cy="201168"/>
+          </a:xfrm>
+          <a:prstGeom prst="rect">
+            <a:avLst/>
+          </a:prstGeom>
+          <a:noFill/>
+        </p:spPr>
+        <p:txBody>
+          <a:bodyPr wrap="square" lIns="45720" rIns="45720">
+            <a:spAutoFit/>
+          </a:bodyPr>
+          <a:lstStyle/>
+          <a:p>
+            <a:pPr algn="l"/>
+            <a:r>
+              <a:rPr sz="900" b="0">
+                <a:solidFill>
+                  <a:srgbClr val="8A95A5"/>
+                </a:solidFill>
+                <a:latin typeface="Helvetica Neue"/>
+              </a:rPr>
+              <a:t>•  Demo script: connect demo SQLite → ask question → chart + summary → switch DB</a:t>
+            </a:r>
+          </a:p>
+        </p:txBody>
+      </p:sp>
+      <p:sp>
+        <p:nvSpPr>
+          <p:cNvPr id="44" name="TextBox 43"/>
+          <p:cNvSpPr txBox="1"/>
+          <p:nvPr/>
+        </p:nvSpPr>
+        <p:spPr>
+          <a:xfrm>
+            <a:off x="3291840" y="6062472"/>
+            <a:ext cx="8412480" cy="201168"/>
+          </a:xfrm>
+          <a:prstGeom prst="rect">
+            <a:avLst/>
+          </a:prstGeom>
+          <a:noFill/>
+        </p:spPr>
+        <p:txBody>
+          <a:bodyPr wrap="square" lIns="45720" rIns="45720">
+            <a:spAutoFit/>
+          </a:bodyPr>
+          <a:lstStyle/>
+          <a:p>
+            <a:pPr algn="l"/>
+            <a:r>
+              <a:rPr sz="900" b="0">
+                <a:solidFill>
+                  <a:srgbClr val="8A95A5"/>
+                </a:solidFill>
+                <a:latin typeface="Helvetica Neue"/>
+              </a:rPr>
+              <a:t>•  Re-record any segments where the live system stutters; caption + edit pass</a:t>
+            </a:r>
+          </a:p>
+        </p:txBody>
+      </p:sp>
+      <p:sp>
+        <p:nvSpPr>
+          <p:cNvPr id="45" name="TextBox 44"/>
+          <p:cNvSpPr txBox="1"/>
+          <p:nvPr/>
+        </p:nvSpPr>
+        <p:spPr>
+          <a:xfrm>
+            <a:off x="3291840" y="6236208"/>
+            <a:ext cx="8412480" cy="201168"/>
+          </a:xfrm>
+          <a:prstGeom prst="rect">
+            <a:avLst/>
+          </a:prstGeom>
+          <a:noFill/>
+        </p:spPr>
+        <p:txBody>
+          <a:bodyPr wrap="square" lIns="45720" rIns="45720">
+            <a:spAutoFit/>
+          </a:bodyPr>
+          <a:lstStyle/>
+          <a:p>
+            <a:pPr algn="l"/>
+            <a:r>
+              <a:rPr sz="900" b="0">
+                <a:solidFill>
+                  <a:srgbClr val="8A95A5"/>
+                </a:solidFill>
+                <a:latin typeface="Helvetica Neue"/>
+              </a:rPr>
+              <a:t>•  Final eval gate against v0.9 RC; capture metrics for release notes</a:t>
+            </a:r>
+          </a:p>
+        </p:txBody>
+      </p:sp>
+      <p:sp>
+        <p:nvSpPr>
+          <p:cNvPr id="46" name="TextBox 45"/>
+          <p:cNvSpPr txBox="1"/>
+          <p:nvPr/>
+        </p:nvSpPr>
+        <p:spPr>
+          <a:xfrm>
+            <a:off x="3291840" y="6409944"/>
+            <a:ext cx="8412480" cy="201168"/>
+          </a:xfrm>
+          <a:prstGeom prst="rect">
+            <a:avLst/>
+          </a:prstGeom>
+          <a:noFill/>
+        </p:spPr>
+        <p:txBody>
+          <a:bodyPr wrap="square" lIns="45720" rIns="45720">
+            <a:spAutoFit/>
+          </a:bodyPr>
+          <a:lstStyle/>
+          <a:p>
+            <a:pPr algn="l"/>
+            <a:r>
+              <a:rPr sz="900" b="0">
+                <a:solidFill>
+                  <a:srgbClr val="8A95A5"/>
+                </a:solidFill>
+                <a:latin typeface="Helvetica Neue"/>
+              </a:rPr>
+              <a:t>•  v0.9 release-candidate tagged + smoke-tested on clean machines</a:t>
+            </a:r>
+          </a:p>
+        </p:txBody>
+      </p:sp>
+      <p:sp>
+        <p:nvSpPr>
+          <p:cNvPr id="47" name="TextBox 46"/>
+          <p:cNvSpPr txBox="1"/>
+          <p:nvPr/>
+        </p:nvSpPr>
+        <p:spPr>
+          <a:xfrm>
+            <a:off x="640080" y="6556248"/>
+            <a:ext cx="1097280" cy="237744"/>
+          </a:xfrm>
+          <a:prstGeom prst="rect">
+            <a:avLst/>
+          </a:prstGeom>
+          <a:noFill/>
+        </p:spPr>
+        <p:txBody>
+          <a:bodyPr wrap="square" lIns="45720" rIns="45720">
+            <a:spAutoFit/>
+          </a:bodyPr>
+          <a:lstStyle/>
+          <a:p>
+            <a:pPr algn="l"/>
+            <a:r>
+              <a:rPr sz="1100" b="1">
+                <a:solidFill>
                   <a:srgbClr val="6EC1FF"/>
                 </a:solidFill>
                 <a:latin typeface="Helvetica Neue"/>
               </a:rPr>
-              <a:t>Thu Apr 30</a:t>
-            </a:r>
-          </a:p>
-        </p:txBody>
-      </p:sp>
-      <p:sp>
-        <p:nvSpPr>
-          <p:cNvPr id="6" name="TextBox 5"/>
-          <p:cNvSpPr txBox="1"/>
-          <p:nvPr/>
-        </p:nvSpPr>
-        <p:spPr>
-          <a:xfrm>
-            <a:off x="2286000" y="1508760"/>
-            <a:ext cx="9418320" cy="237744"/>
+              <a:t>Fri Jun 13</a:t>
+            </a:r>
+          </a:p>
+        </p:txBody>
+      </p:sp>
+      <p:sp>
+        <p:nvSpPr>
+          <p:cNvPr id="48" name="TextBox 47"/>
+          <p:cNvSpPr txBox="1"/>
+          <p:nvPr/>
+        </p:nvSpPr>
+        <p:spPr>
+          <a:xfrm>
+            <a:off x="1783080" y="6556248"/>
+            <a:ext cx="1463040" cy="237744"/>
+          </a:xfrm>
+          <a:prstGeom prst="rect">
+            <a:avLst/>
+          </a:prstGeom>
+          <a:noFill/>
+        </p:spPr>
+        <p:txBody>
+          <a:bodyPr wrap="square" lIns="45720" rIns="45720">
+            <a:spAutoFit/>
+          </a:bodyPr>
+          <a:lstStyle/>
+          <a:p>
+            <a:pPr algn="l"/>
+            <a:r>
+              <a:rPr sz="1000" b="0">
+                <a:solidFill>
+                  <a:srgbClr val="8A95A5"/>
+                </a:solidFill>
+                <a:latin typeface="Helvetica Neue"/>
+              </a:rPr>
+              <a:t>Release day</a:t>
+            </a:r>
+          </a:p>
+        </p:txBody>
+      </p:sp>
+      <p:sp>
+        <p:nvSpPr>
+          <p:cNvPr id="49" name="TextBox 48"/>
+          <p:cNvSpPr txBox="1"/>
+          <p:nvPr/>
+        </p:nvSpPr>
+        <p:spPr>
+          <a:xfrm>
+            <a:off x="3291840" y="6556248"/>
+            <a:ext cx="8412480" cy="237744"/>
           </a:xfrm>
           <a:prstGeom prst="rect">
             <a:avLst/>
@@ -11398,25 +12903,25 @@
             <a:r>
               <a:rPr sz="1100" b="1">
                 <a:solidFill>
-                  <a:srgbClr val="E6EAF0"/>
-                </a:solidFill>
-                <a:latin typeface="Helvetica Neue"/>
-              </a:rPr>
-              <a:t>Multi-provider regression matrix — kickoff</a:t>
-            </a:r>
-          </a:p>
-        </p:txBody>
-      </p:sp>
-      <p:sp>
-        <p:nvSpPr>
-          <p:cNvPr id="7" name="TextBox 6"/>
-          <p:cNvSpPr txBox="1"/>
-          <p:nvPr/>
-        </p:nvSpPr>
-        <p:spPr>
-          <a:xfrm>
-            <a:off x="2286000" y="1682495"/>
-            <a:ext cx="9418320" cy="201168"/>
+                  <a:srgbClr val="4AD09C"/>
+                </a:solidFill>
+                <a:latin typeface="Helvetica Neue"/>
+              </a:rPr>
+              <a:t>v0.9 RELEASE</a:t>
+            </a:r>
+          </a:p>
+        </p:txBody>
+      </p:sp>
+      <p:sp>
+        <p:nvSpPr>
+          <p:cNvPr id="50" name="TextBox 49"/>
+          <p:cNvSpPr txBox="1"/>
+          <p:nvPr/>
+        </p:nvSpPr>
+        <p:spPr>
+          <a:xfrm>
+            <a:off x="3291840" y="6729984"/>
+            <a:ext cx="8412480" cy="201168"/>
           </a:xfrm>
           <a:prstGeom prst="rect">
             <a:avLst/>
@@ -11437,21 +12942,21 @@
                 </a:solidFill>
                 <a:latin typeface="Helvetica Neue"/>
               </a:rPr>
-              <a:t>•  Lock the matrix shape: 5 LLMs × 4 embeddings × 3 dialects × 4 consumers</a:t>
-            </a:r>
-          </a:p>
-        </p:txBody>
-      </p:sp>
-      <p:sp>
-        <p:nvSpPr>
-          <p:cNvPr id="8" name="TextBox 7"/>
-          <p:cNvSpPr txBox="1"/>
-          <p:nvPr/>
-        </p:nvSpPr>
-        <p:spPr>
-          <a:xfrm>
-            <a:off x="2286000" y="1856231"/>
-            <a:ext cx="9418320" cy="201168"/>
+              <a:t>•  Tag v0.9 on main; push to GitHub Releases with the recorded demo attached</a:t>
+            </a:r>
+          </a:p>
+        </p:txBody>
+      </p:sp>
+      <p:sp>
+        <p:nvSpPr>
+          <p:cNvPr id="51" name="TextBox 50"/>
+          <p:cNvSpPr txBox="1"/>
+          <p:nvPr/>
+        </p:nvSpPr>
+        <p:spPr>
+          <a:xfrm>
+            <a:off x="3291840" y="6903720"/>
+            <a:ext cx="8412480" cy="201168"/>
           </a:xfrm>
           <a:prstGeom prst="rect">
             <a:avLst/>
@@ -11472,91 +12977,21 @@
                 </a:solidFill>
                 <a:latin typeface="Helvetica Neue"/>
               </a:rPr>
-              <a:t>•  Stand up CI fixture set; run agent loop against Anthropic + Bedrock first</a:t>
-            </a:r>
-          </a:p>
-        </p:txBody>
-      </p:sp>
-      <p:sp>
-        <p:nvSpPr>
-          <p:cNvPr id="9" name="TextBox 8"/>
-          <p:cNvSpPr txBox="1"/>
-          <p:nvPr/>
-        </p:nvSpPr>
-        <p:spPr>
-          <a:xfrm>
-            <a:off x="640080" y="2057400"/>
-            <a:ext cx="1554480" cy="237744"/>
-          </a:xfrm>
-          <a:prstGeom prst="rect">
-            <a:avLst/>
-          </a:prstGeom>
-          <a:noFill/>
-        </p:spPr>
-        <p:txBody>
-          <a:bodyPr wrap="square" lIns="45720" rIns="45720">
-            <a:spAutoFit/>
-          </a:bodyPr>
-          <a:lstStyle/>
-          <a:p>
-            <a:pPr algn="l"/>
-            <a:r>
-              <a:rPr sz="1100" b="1">
-                <a:solidFill>
-                  <a:srgbClr val="6EC1FF"/>
-                </a:solidFill>
-                <a:latin typeface="Helvetica Neue"/>
-              </a:rPr>
-              <a:t>Mon May 4</a:t>
-            </a:r>
-          </a:p>
-        </p:txBody>
-      </p:sp>
-      <p:sp>
-        <p:nvSpPr>
-          <p:cNvPr id="10" name="TextBox 9"/>
-          <p:cNvSpPr txBox="1"/>
-          <p:nvPr/>
-        </p:nvSpPr>
-        <p:spPr>
-          <a:xfrm>
-            <a:off x="2286000" y="2057400"/>
-            <a:ext cx="9418320" cy="237744"/>
-          </a:xfrm>
-          <a:prstGeom prst="rect">
-            <a:avLst/>
-          </a:prstGeom>
-          <a:noFill/>
-        </p:spPr>
-        <p:txBody>
-          <a:bodyPr wrap="square" lIns="45720" rIns="45720">
-            <a:spAutoFit/>
-          </a:bodyPr>
-          <a:lstStyle/>
-          <a:p>
-            <a:pPr algn="l"/>
-            <a:r>
-              <a:rPr sz="1100" b="1">
-                <a:solidFill>
-                  <a:srgbClr val="E6EAF0"/>
-                </a:solidFill>
-                <a:latin typeface="Helvetica Neue"/>
-              </a:rPr>
-              <a:t>Multi-provider matrix — coverage</a:t>
-            </a:r>
-          </a:p>
-        </p:txBody>
-      </p:sp>
-      <p:sp>
-        <p:nvSpPr>
-          <p:cNvPr id="11" name="TextBox 10"/>
-          <p:cNvSpPr txBox="1"/>
-          <p:nvPr/>
-        </p:nvSpPr>
-        <p:spPr>
-          <a:xfrm>
-            <a:off x="2286000" y="2231136"/>
-            <a:ext cx="9418320" cy="201168"/>
+              <a:t>•  Distribute client-facing release summary + recorded walkthrough</a:t>
+            </a:r>
+          </a:p>
+        </p:txBody>
+      </p:sp>
+      <p:sp>
+        <p:nvSpPr>
+          <p:cNvPr id="52" name="TextBox 51"/>
+          <p:cNvSpPr txBox="1"/>
+          <p:nvPr/>
+        </p:nvSpPr>
+        <p:spPr>
+          <a:xfrm>
+            <a:off x="3291840" y="7077456"/>
+            <a:ext cx="8412480" cy="201168"/>
           </a:xfrm>
           <a:prstGeom prst="rect">
             <a:avLst/>
@@ -11577,1442 +13012,7 @@
                 </a:solidFill>
                 <a:latin typeface="Helvetica Neue"/>
               </a:rPr>
-              <a:t>•  Add Azure OpenAI + OpenAI + OpenRouter coverage; capture per-provider regressions</a:t>
-            </a:r>
-          </a:p>
-        </p:txBody>
-      </p:sp>
-      <p:sp>
-        <p:nvSpPr>
-          <p:cNvPr id="12" name="TextBox 11"/>
-          <p:cNvSpPr txBox="1"/>
-          <p:nvPr/>
-        </p:nvSpPr>
-        <p:spPr>
-          <a:xfrm>
-            <a:off x="2286000" y="2404872"/>
-            <a:ext cx="9418320" cy="201168"/>
-          </a:xfrm>
-          <a:prstGeom prst="rect">
-            <a:avLst/>
-          </a:prstGeom>
-          <a:noFill/>
-        </p:spPr>
-        <p:txBody>
-          <a:bodyPr wrap="square" lIns="45720" rIns="45720">
-            <a:spAutoFit/>
-          </a:bodyPr>
-          <a:lstStyle/>
-          <a:p>
-            <a:pPr algn="l"/>
-            <a:r>
-              <a:rPr sz="900" b="0">
-                <a:solidFill>
-                  <a:srgbClr val="8A95A5"/>
-                </a:solidFill>
-                <a:latin typeface="Helvetica Neue"/>
-              </a:rPr>
-              <a:t>•  Patch agent translator layer for any newly surfaced gaps</a:t>
-            </a:r>
-          </a:p>
-        </p:txBody>
-      </p:sp>
-      <p:sp>
-        <p:nvSpPr>
-          <p:cNvPr id="13" name="TextBox 12"/>
-          <p:cNvSpPr txBox="1"/>
-          <p:nvPr/>
-        </p:nvSpPr>
-        <p:spPr>
-          <a:xfrm>
-            <a:off x="640080" y="2606040"/>
-            <a:ext cx="1554480" cy="237744"/>
-          </a:xfrm>
-          <a:prstGeom prst="rect">
-            <a:avLst/>
-          </a:prstGeom>
-          <a:noFill/>
-        </p:spPr>
-        <p:txBody>
-          <a:bodyPr wrap="square" lIns="45720" rIns="45720">
-            <a:spAutoFit/>
-          </a:bodyPr>
-          <a:lstStyle/>
-          <a:p>
-            <a:pPr algn="l"/>
-            <a:r>
-              <a:rPr sz="1100" b="1">
-                <a:solidFill>
-                  <a:srgbClr val="6EC1FF"/>
-                </a:solidFill>
-                <a:latin typeface="Helvetica Neue"/>
-              </a:rPr>
-              <a:t>Tue May 5</a:t>
-            </a:r>
-          </a:p>
-        </p:txBody>
-      </p:sp>
-      <p:sp>
-        <p:nvSpPr>
-          <p:cNvPr id="14" name="TextBox 13"/>
-          <p:cNvSpPr txBox="1"/>
-          <p:nvPr/>
-        </p:nvSpPr>
-        <p:spPr>
-          <a:xfrm>
-            <a:off x="2286000" y="2606040"/>
-            <a:ext cx="9418320" cy="237744"/>
-          </a:xfrm>
-          <a:prstGeom prst="rect">
-            <a:avLst/>
-          </a:prstGeom>
-          <a:noFill/>
-        </p:spPr>
-        <p:txBody>
-          <a:bodyPr wrap="square" lIns="45720" rIns="45720">
-            <a:spAutoFit/>
-          </a:bodyPr>
-          <a:lstStyle/>
-          <a:p>
-            <a:pPr algn="l"/>
-            <a:r>
-              <a:rPr sz="1100" b="1">
-                <a:solidFill>
-                  <a:srgbClr val="E6EAF0"/>
-                </a:solidFill>
-                <a:latin typeface="Helvetica Neue"/>
-              </a:rPr>
-              <a:t>Auto sub-clustering (Leiden) inside oversize domains</a:t>
-            </a:r>
-          </a:p>
-        </p:txBody>
-      </p:sp>
-      <p:sp>
-        <p:nvSpPr>
-          <p:cNvPr id="15" name="TextBox 14"/>
-          <p:cNvSpPr txBox="1"/>
-          <p:nvPr/>
-        </p:nvSpPr>
-        <p:spPr>
-          <a:xfrm>
-            <a:off x="2286000" y="2779776"/>
-            <a:ext cx="9418320" cy="201168"/>
-          </a:xfrm>
-          <a:prstGeom prst="rect">
-            <a:avLst/>
-          </a:prstGeom>
-          <a:noFill/>
-        </p:spPr>
-        <p:txBody>
-          <a:bodyPr wrap="square" lIns="45720" rIns="45720">
-            <a:spAutoFit/>
-          </a:bodyPr>
-          <a:lstStyle/>
-          <a:p>
-            <a:pPr algn="l"/>
-            <a:r>
-              <a:rPr sz="900" b="0">
-                <a:solidFill>
-                  <a:srgbClr val="8A95A5"/>
-                </a:solidFill>
-                <a:latin typeface="Helvetica Neue"/>
-              </a:rPr>
-              <a:t>•  Build affinity matrix (cosine + graph proximity + name jaccard)</a:t>
-            </a:r>
-          </a:p>
-        </p:txBody>
-      </p:sp>
-      <p:sp>
-        <p:nvSpPr>
-          <p:cNvPr id="16" name="TextBox 15"/>
-          <p:cNvSpPr txBox="1"/>
-          <p:nvPr/>
-        </p:nvSpPr>
-        <p:spPr>
-          <a:xfrm>
-            <a:off x="2286000" y="2953512"/>
-            <a:ext cx="9418320" cy="201168"/>
-          </a:xfrm>
-          <a:prstGeom prst="rect">
-            <a:avLst/>
-          </a:prstGeom>
-          <a:noFill/>
-        </p:spPr>
-        <p:txBody>
-          <a:bodyPr wrap="square" lIns="45720" rIns="45720">
-            <a:spAutoFit/>
-          </a:bodyPr>
-          <a:lstStyle/>
-          <a:p>
-            <a:pPr algn="l"/>
-            <a:r>
-              <a:rPr sz="900" b="0">
-                <a:solidFill>
-                  <a:srgbClr val="8A95A5"/>
-                </a:solidFill>
-                <a:latin typeface="Helvetica Neue"/>
-              </a:rPr>
-              <a:t>•  Tune Leiden for 8–20 tables/cluster; LLM auto-naming for sub-clusters</a:t>
-            </a:r>
-          </a:p>
-        </p:txBody>
-      </p:sp>
-      <p:sp>
-        <p:nvSpPr>
-          <p:cNvPr id="17" name="TextBox 16"/>
-          <p:cNvSpPr txBox="1"/>
-          <p:nvPr/>
-        </p:nvSpPr>
-        <p:spPr>
-          <a:xfrm>
-            <a:off x="2286000" y="3127248"/>
-            <a:ext cx="9418320" cy="201168"/>
-          </a:xfrm>
-          <a:prstGeom prst="rect">
-            <a:avLst/>
-          </a:prstGeom>
-          <a:noFill/>
-        </p:spPr>
-        <p:txBody>
-          <a:bodyPr wrap="square" lIns="45720" rIns="45720">
-            <a:spAutoFit/>
-          </a:bodyPr>
-          <a:lstStyle/>
-          <a:p>
-            <a:pPr algn="l"/>
-            <a:r>
-              <a:rPr sz="900" b="0">
-                <a:solidFill>
-                  <a:srgbClr val="8A95A5"/>
-                </a:solidFill>
-                <a:latin typeface="Helvetica Neue"/>
-              </a:rPr>
-              <a:t>•  Hungarian assignment for cluster-ID stability across rebuilds</a:t>
-            </a:r>
-          </a:p>
-        </p:txBody>
-      </p:sp>
-      <p:sp>
-        <p:nvSpPr>
-          <p:cNvPr id="18" name="TextBox 17"/>
-          <p:cNvSpPr txBox="1"/>
-          <p:nvPr/>
-        </p:nvSpPr>
-        <p:spPr>
-          <a:xfrm>
-            <a:off x="640080" y="3328416"/>
-            <a:ext cx="1554480" cy="237744"/>
-          </a:xfrm>
-          <a:prstGeom prst="rect">
-            <a:avLst/>
-          </a:prstGeom>
-          <a:noFill/>
-        </p:spPr>
-        <p:txBody>
-          <a:bodyPr wrap="square" lIns="45720" rIns="45720">
-            <a:spAutoFit/>
-          </a:bodyPr>
-          <a:lstStyle/>
-          <a:p>
-            <a:pPr algn="l"/>
-            <a:r>
-              <a:rPr sz="1100" b="1">
-                <a:solidFill>
-                  <a:srgbClr val="6EC1FF"/>
-                </a:solidFill>
-                <a:latin typeface="Helvetica Neue"/>
-              </a:rPr>
-              <a:t>Wed May 6</a:t>
-            </a:r>
-          </a:p>
-        </p:txBody>
-      </p:sp>
-      <p:sp>
-        <p:nvSpPr>
-          <p:cNvPr id="19" name="TextBox 18"/>
-          <p:cNvSpPr txBox="1"/>
-          <p:nvPr/>
-        </p:nvSpPr>
-        <p:spPr>
-          <a:xfrm>
-            <a:off x="2286000" y="3328416"/>
-            <a:ext cx="9418320" cy="237744"/>
-          </a:xfrm>
-          <a:prstGeom prst="rect">
-            <a:avLst/>
-          </a:prstGeom>
-          <a:noFill/>
-        </p:spPr>
-        <p:txBody>
-          <a:bodyPr wrap="square" lIns="45720" rIns="45720">
-            <a:spAutoFit/>
-          </a:bodyPr>
-          <a:lstStyle/>
-          <a:p>
-            <a:pPr algn="l"/>
-            <a:r>
-              <a:rPr sz="1100" b="1">
-                <a:solidFill>
-                  <a:srgbClr val="E6EAF0"/>
-                </a:solidFill>
-                <a:latin typeface="Helvetica Neue"/>
-              </a:rPr>
-              <a:t>Agentic polish — tool reliability + UX</a:t>
-            </a:r>
-          </a:p>
-        </p:txBody>
-      </p:sp>
-      <p:sp>
-        <p:nvSpPr>
-          <p:cNvPr id="20" name="TextBox 19"/>
-          <p:cNvSpPr txBox="1"/>
-          <p:nvPr/>
-        </p:nvSpPr>
-        <p:spPr>
-          <a:xfrm>
-            <a:off x="2286000" y="3502152"/>
-            <a:ext cx="9418320" cy="201168"/>
-          </a:xfrm>
-          <a:prstGeom prst="rect">
-            <a:avLst/>
-          </a:prstGeom>
-          <a:noFill/>
-        </p:spPr>
-        <p:txBody>
-          <a:bodyPr wrap="square" lIns="45720" rIns="45720">
-            <a:spAutoFit/>
-          </a:bodyPr>
-          <a:lstStyle/>
-          <a:p>
-            <a:pPr algn="l"/>
-            <a:r>
-              <a:rPr sz="900" b="0">
-                <a:solidFill>
-                  <a:srgbClr val="8A95A5"/>
-                </a:solidFill>
-                <a:latin typeface="Helvetica Neue"/>
-              </a:rPr>
-              <a:t>•  Tool-call retries on transient provider errors; structured failure surfaces</a:t>
-            </a:r>
-          </a:p>
-        </p:txBody>
-      </p:sp>
-      <p:sp>
-        <p:nvSpPr>
-          <p:cNvPr id="21" name="TextBox 20"/>
-          <p:cNvSpPr txBox="1"/>
-          <p:nvPr/>
-        </p:nvSpPr>
-        <p:spPr>
-          <a:xfrm>
-            <a:off x="2286000" y="3675888"/>
-            <a:ext cx="9418320" cy="201168"/>
-          </a:xfrm>
-          <a:prstGeom prst="rect">
-            <a:avLst/>
-          </a:prstGeom>
-          <a:noFill/>
-        </p:spPr>
-        <p:txBody>
-          <a:bodyPr wrap="square" lIns="45720" rIns="45720">
-            <a:spAutoFit/>
-          </a:bodyPr>
-          <a:lstStyle/>
-          <a:p>
-            <a:pPr algn="l"/>
-            <a:r>
-              <a:rPr sz="900" b="0">
-                <a:solidFill>
-                  <a:srgbClr val="8A95A5"/>
-                </a:solidFill>
-                <a:latin typeface="Helvetica Neue"/>
-              </a:rPr>
-              <a:t>•  Streaming UX refinements; chart-export and eval-drilldown agent tools</a:t>
-            </a:r>
-          </a:p>
-        </p:txBody>
-      </p:sp>
-      <p:sp>
-        <p:nvSpPr>
-          <p:cNvPr id="22" name="TextBox 21"/>
-          <p:cNvSpPr txBox="1"/>
-          <p:nvPr/>
-        </p:nvSpPr>
-        <p:spPr>
-          <a:xfrm>
-            <a:off x="2286000" y="3849624"/>
-            <a:ext cx="9418320" cy="201168"/>
-          </a:xfrm>
-          <a:prstGeom prst="rect">
-            <a:avLst/>
-          </a:prstGeom>
-          <a:noFill/>
-        </p:spPr>
-        <p:txBody>
-          <a:bodyPr wrap="square" lIns="45720" rIns="45720">
-            <a:spAutoFit/>
-          </a:bodyPr>
-          <a:lstStyle/>
-          <a:p>
-            <a:pPr algn="l"/>
-            <a:r>
-              <a:rPr sz="900" b="0">
-                <a:solidFill>
-                  <a:srgbClr val="8A95A5"/>
-                </a:solidFill>
-                <a:latin typeface="Helvetica Neue"/>
-              </a:rPr>
-              <a:t>•  Conversation list polish (rename, archive, filter)</a:t>
-            </a:r>
-          </a:p>
-        </p:txBody>
-      </p:sp>
-      <p:sp>
-        <p:nvSpPr>
-          <p:cNvPr id="23" name="TextBox 22"/>
-          <p:cNvSpPr txBox="1"/>
-          <p:nvPr/>
-        </p:nvSpPr>
-        <p:spPr>
-          <a:xfrm>
-            <a:off x="640080" y="4050792"/>
-            <a:ext cx="1554480" cy="237744"/>
-          </a:xfrm>
-          <a:prstGeom prst="rect">
-            <a:avLst/>
-          </a:prstGeom>
-          <a:noFill/>
-        </p:spPr>
-        <p:txBody>
-          <a:bodyPr wrap="square" lIns="45720" rIns="45720">
-            <a:spAutoFit/>
-          </a:bodyPr>
-          <a:lstStyle/>
-          <a:p>
-            <a:pPr algn="l"/>
-            <a:r>
-              <a:rPr sz="1100" b="1">
-                <a:solidFill>
-                  <a:srgbClr val="6EC1FF"/>
-                </a:solidFill>
-                <a:latin typeface="Helvetica Neue"/>
-              </a:rPr>
-              <a:t>Thu May 7</a:t>
-            </a:r>
-          </a:p>
-        </p:txBody>
-      </p:sp>
-      <p:sp>
-        <p:nvSpPr>
-          <p:cNvPr id="24" name="TextBox 23"/>
-          <p:cNvSpPr txBox="1"/>
-          <p:nvPr/>
-        </p:nvSpPr>
-        <p:spPr>
-          <a:xfrm>
-            <a:off x="2286000" y="4050792"/>
-            <a:ext cx="9418320" cy="237744"/>
-          </a:xfrm>
-          <a:prstGeom prst="rect">
-            <a:avLst/>
-          </a:prstGeom>
-          <a:noFill/>
-        </p:spPr>
-        <p:txBody>
-          <a:bodyPr wrap="square" lIns="45720" rIns="45720">
-            <a:spAutoFit/>
-          </a:bodyPr>
-          <a:lstStyle/>
-          <a:p>
-            <a:pPr algn="l"/>
-            <a:r>
-              <a:rPr sz="1100" b="1">
-                <a:solidFill>
-                  <a:srgbClr val="E6EAF0"/>
-                </a:solidFill>
-                <a:latin typeface="Helvetica Neue"/>
-              </a:rPr>
-              <a:t>Observability scaffolding</a:t>
-            </a:r>
-          </a:p>
-        </p:txBody>
-      </p:sp>
-      <p:sp>
-        <p:nvSpPr>
-          <p:cNvPr id="25" name="TextBox 24"/>
-          <p:cNvSpPr txBox="1"/>
-          <p:nvPr/>
-        </p:nvSpPr>
-        <p:spPr>
-          <a:xfrm>
-            <a:off x="2286000" y="4224528"/>
-            <a:ext cx="9418320" cy="201168"/>
-          </a:xfrm>
-          <a:prstGeom prst="rect">
-            <a:avLst/>
-          </a:prstGeom>
-          <a:noFill/>
-        </p:spPr>
-        <p:txBody>
-          <a:bodyPr wrap="square" lIns="45720" rIns="45720">
-            <a:spAutoFit/>
-          </a:bodyPr>
-          <a:lstStyle/>
-          <a:p>
-            <a:pPr algn="l"/>
-            <a:r>
-              <a:rPr sz="900" b="0">
-                <a:solidFill>
-                  <a:srgbClr val="8A95A5"/>
-                </a:solidFill>
-                <a:latin typeface="Helvetica Neue"/>
-              </a:rPr>
-              <a:t>•  OpenTelemetry spans on every pipeline + agent stage</a:t>
-            </a:r>
-          </a:p>
-        </p:txBody>
-      </p:sp>
-      <p:sp>
-        <p:nvSpPr>
-          <p:cNvPr id="26" name="TextBox 25"/>
-          <p:cNvSpPr txBox="1"/>
-          <p:nvPr/>
-        </p:nvSpPr>
-        <p:spPr>
-          <a:xfrm>
-            <a:off x="2286000" y="4398264"/>
-            <a:ext cx="9418320" cy="201168"/>
-          </a:xfrm>
-          <a:prstGeom prst="rect">
-            <a:avLst/>
-          </a:prstGeom>
-          <a:noFill/>
-        </p:spPr>
-        <p:txBody>
-          <a:bodyPr wrap="square" lIns="45720" rIns="45720">
-            <a:spAutoFit/>
-          </a:bodyPr>
-          <a:lstStyle/>
-          <a:p>
-            <a:pPr algn="l"/>
-            <a:r>
-              <a:rPr sz="900" b="0">
-                <a:solidFill>
-                  <a:srgbClr val="8A95A5"/>
-                </a:solidFill>
-                <a:latin typeface="Helvetica Neue"/>
-              </a:rPr>
-              <a:t>•  Prometheus counters/histograms; Grafana dashboards in infra/grafana/</a:t>
-            </a:r>
-          </a:p>
-        </p:txBody>
-      </p:sp>
-      <p:sp>
-        <p:nvSpPr>
-          <p:cNvPr id="27" name="TextBox 26"/>
-          <p:cNvSpPr txBox="1"/>
-          <p:nvPr/>
-        </p:nvSpPr>
-        <p:spPr>
-          <a:xfrm>
-            <a:off x="2286000" y="4572000"/>
-            <a:ext cx="9418320" cy="201168"/>
-          </a:xfrm>
-          <a:prstGeom prst="rect">
-            <a:avLst/>
-          </a:prstGeom>
-          <a:noFill/>
-        </p:spPr>
-        <p:txBody>
-          <a:bodyPr wrap="square" lIns="45720" rIns="45720">
-            <a:spAutoFit/>
-          </a:bodyPr>
-          <a:lstStyle/>
-          <a:p>
-            <a:pPr algn="l"/>
-            <a:r>
-              <a:rPr sz="900" b="0">
-                <a:solidFill>
-                  <a:srgbClr val="8A95A5"/>
-                </a:solidFill>
-                <a:latin typeface="Helvetica Neue"/>
-              </a:rPr>
-              <a:t>•  Wire structured logging context (request id, provider, dialect)</a:t>
-            </a:r>
-          </a:p>
-        </p:txBody>
-      </p:sp>
-      <p:sp>
-        <p:nvSpPr>
-          <p:cNvPr id="28" name="TextBox 27"/>
-          <p:cNvSpPr txBox="1"/>
-          <p:nvPr/>
-        </p:nvSpPr>
-        <p:spPr>
-          <a:xfrm>
-            <a:off x="640080" y="4773168"/>
-            <a:ext cx="1554480" cy="237744"/>
-          </a:xfrm>
-          <a:prstGeom prst="rect">
-            <a:avLst/>
-          </a:prstGeom>
-          <a:noFill/>
-        </p:spPr>
-        <p:txBody>
-          <a:bodyPr wrap="square" lIns="45720" rIns="45720">
-            <a:spAutoFit/>
-          </a:bodyPr>
-          <a:lstStyle/>
-          <a:p>
-            <a:pPr algn="l"/>
-            <a:r>
-              <a:rPr sz="1100" b="1">
-                <a:solidFill>
-                  <a:srgbClr val="6EC1FF"/>
-                </a:solidFill>
-                <a:latin typeface="Helvetica Neue"/>
-              </a:rPr>
-              <a:t>Fri May 8</a:t>
-            </a:r>
-          </a:p>
-        </p:txBody>
-      </p:sp>
-      <p:sp>
-        <p:nvSpPr>
-          <p:cNvPr id="29" name="TextBox 28"/>
-          <p:cNvSpPr txBox="1"/>
-          <p:nvPr/>
-        </p:nvSpPr>
-        <p:spPr>
-          <a:xfrm>
-            <a:off x="2286000" y="4773168"/>
-            <a:ext cx="9418320" cy="237744"/>
-          </a:xfrm>
-          <a:prstGeom prst="rect">
-            <a:avLst/>
-          </a:prstGeom>
-          <a:noFill/>
-        </p:spPr>
-        <p:txBody>
-          <a:bodyPr wrap="square" lIns="45720" rIns="45720">
-            <a:spAutoFit/>
-          </a:bodyPr>
-          <a:lstStyle/>
-          <a:p>
-            <a:pPr algn="l"/>
-            <a:r>
-              <a:rPr sz="1100" b="1">
-                <a:solidFill>
-                  <a:srgbClr val="E6EAF0"/>
-                </a:solidFill>
-                <a:latin typeface="Helvetica Neue"/>
-              </a:rPr>
-              <a:t>Eval suite expansion + nightly gate</a:t>
-            </a:r>
-          </a:p>
-        </p:txBody>
-      </p:sp>
-      <p:sp>
-        <p:nvSpPr>
-          <p:cNvPr id="30" name="TextBox 29"/>
-          <p:cNvSpPr txBox="1"/>
-          <p:nvPr/>
-        </p:nvSpPr>
-        <p:spPr>
-          <a:xfrm>
-            <a:off x="2286000" y="4946904"/>
-            <a:ext cx="9418320" cy="201168"/>
-          </a:xfrm>
-          <a:prstGeom prst="rect">
-            <a:avLst/>
-          </a:prstGeom>
-          <a:noFill/>
-        </p:spPr>
-        <p:txBody>
-          <a:bodyPr wrap="square" lIns="45720" rIns="45720">
-            <a:spAutoFit/>
-          </a:bodyPr>
-          <a:lstStyle/>
-          <a:p>
-            <a:pPr algn="l"/>
-            <a:r>
-              <a:rPr sz="900" b="0">
-                <a:solidFill>
-                  <a:srgbClr val="8A95A5"/>
-                </a:solidFill>
-                <a:latin typeface="Helvetica Neue"/>
-              </a:rPr>
-              <a:t>•  Expand gold-question suite from 50 to 100 questions</a:t>
-            </a:r>
-          </a:p>
-        </p:txBody>
-      </p:sp>
-      <p:sp>
-        <p:nvSpPr>
-          <p:cNvPr id="31" name="TextBox 30"/>
-          <p:cNvSpPr txBox="1"/>
-          <p:nvPr/>
-        </p:nvSpPr>
-        <p:spPr>
-          <a:xfrm>
-            <a:off x="2286000" y="5120640"/>
-            <a:ext cx="9418320" cy="201168"/>
-          </a:xfrm>
-          <a:prstGeom prst="rect">
-            <a:avLst/>
-          </a:prstGeom>
-          <a:noFill/>
-        </p:spPr>
-        <p:txBody>
-          <a:bodyPr wrap="square" lIns="45720" rIns="45720">
-            <a:spAutoFit/>
-          </a:bodyPr>
-          <a:lstStyle/>
-          <a:p>
-            <a:pPr algn="l"/>
-            <a:r>
-              <a:rPr sz="900" b="0">
-                <a:solidFill>
-                  <a:srgbClr val="8A95A5"/>
-                </a:solidFill>
-                <a:latin typeface="Helvetica Neue"/>
-              </a:rPr>
-              <a:t>•  Wire CI nightly run; gate on &gt;2pp execution-accuracy regression</a:t>
-            </a:r>
-          </a:p>
-        </p:txBody>
-      </p:sp>
-      <p:sp>
-        <p:nvSpPr>
-          <p:cNvPr id="32" name="TextBox 31"/>
-          <p:cNvSpPr txBox="1"/>
-          <p:nvPr/>
-        </p:nvSpPr>
-        <p:spPr>
-          <a:xfrm>
-            <a:off x="2286000" y="5294376"/>
-            <a:ext cx="9418320" cy="201168"/>
-          </a:xfrm>
-          <a:prstGeom prst="rect">
-            <a:avLst/>
-          </a:prstGeom>
-          <a:noFill/>
-        </p:spPr>
-        <p:txBody>
-          <a:bodyPr wrap="square" lIns="45720" rIns="45720">
-            <a:spAutoFit/>
-          </a:bodyPr>
-          <a:lstStyle/>
-          <a:p>
-            <a:pPr algn="l"/>
-            <a:r>
-              <a:rPr sz="900" b="0">
-                <a:solidFill>
-                  <a:srgbClr val="8A95A5"/>
-                </a:solidFill>
-                <a:latin typeface="Helvetica Neue"/>
-              </a:rPr>
-              <a:t>•  Eval Dashboard polish: per-build deltas, regression alerts</a:t>
-            </a:r>
-          </a:p>
-        </p:txBody>
-      </p:sp>
-      <p:sp>
-        <p:nvSpPr>
-          <p:cNvPr id="33" name="TextBox 32"/>
-          <p:cNvSpPr txBox="1"/>
-          <p:nvPr/>
-        </p:nvSpPr>
-        <p:spPr>
-          <a:xfrm>
-            <a:off x="640080" y="5495544"/>
-            <a:ext cx="1554480" cy="237744"/>
-          </a:xfrm>
-          <a:prstGeom prst="rect">
-            <a:avLst/>
-          </a:prstGeom>
-          <a:noFill/>
-        </p:spPr>
-        <p:txBody>
-          <a:bodyPr wrap="square" lIns="45720" rIns="45720">
-            <a:spAutoFit/>
-          </a:bodyPr>
-          <a:lstStyle/>
-          <a:p>
-            <a:pPr algn="l"/>
-            <a:r>
-              <a:rPr sz="1100" b="1">
-                <a:solidFill>
-                  <a:srgbClr val="6EC1FF"/>
-                </a:solidFill>
-                <a:latin typeface="Helvetica Neue"/>
-              </a:rPr>
-              <a:t>Mon May 11</a:t>
-            </a:r>
-          </a:p>
-        </p:txBody>
-      </p:sp>
-      <p:sp>
-        <p:nvSpPr>
-          <p:cNvPr id="34" name="TextBox 33"/>
-          <p:cNvSpPr txBox="1"/>
-          <p:nvPr/>
-        </p:nvSpPr>
-        <p:spPr>
-          <a:xfrm>
-            <a:off x="2286000" y="5495544"/>
-            <a:ext cx="9418320" cy="237744"/>
-          </a:xfrm>
-          <a:prstGeom prst="rect">
-            <a:avLst/>
-          </a:prstGeom>
-          <a:noFill/>
-        </p:spPr>
-        <p:txBody>
-          <a:bodyPr wrap="square" lIns="45720" rIns="45720">
-            <a:spAutoFit/>
-          </a:bodyPr>
-          <a:lstStyle/>
-          <a:p>
-            <a:pPr algn="l"/>
-            <a:r>
-              <a:rPr sz="1100" b="1">
-                <a:solidFill>
-                  <a:srgbClr val="E6EAF0"/>
-                </a:solidFill>
-                <a:latin typeface="Helvetica Neue"/>
-              </a:rPr>
-              <a:t>Performance pass + caching</a:t>
-            </a:r>
-          </a:p>
-        </p:txBody>
-      </p:sp>
-      <p:sp>
-        <p:nvSpPr>
-          <p:cNvPr id="35" name="TextBox 34"/>
-          <p:cNvSpPr txBox="1"/>
-          <p:nvPr/>
-        </p:nvSpPr>
-        <p:spPr>
-          <a:xfrm>
-            <a:off x="2286000" y="5669280"/>
-            <a:ext cx="9418320" cy="201168"/>
-          </a:xfrm>
-          <a:prstGeom prst="rect">
-            <a:avLst/>
-          </a:prstGeom>
-          <a:noFill/>
-        </p:spPr>
-        <p:txBody>
-          <a:bodyPr wrap="square" lIns="45720" rIns="45720">
-            <a:spAutoFit/>
-          </a:bodyPr>
-          <a:lstStyle/>
-          <a:p>
-            <a:pPr algn="l"/>
-            <a:r>
-              <a:rPr sz="900" b="0">
-                <a:solidFill>
-                  <a:srgbClr val="8A95A5"/>
-                </a:solidFill>
-                <a:latin typeface="Helvetica Neue"/>
-              </a:rPr>
-              <a:t>•  APSP load + retrieval cache hot paths; verify p95 latency budget per spec §17</a:t>
-            </a:r>
-          </a:p>
-        </p:txBody>
-      </p:sp>
-      <p:sp>
-        <p:nvSpPr>
-          <p:cNvPr id="36" name="TextBox 35"/>
-          <p:cNvSpPr txBox="1"/>
-          <p:nvPr/>
-        </p:nvSpPr>
-        <p:spPr>
-          <a:xfrm>
-            <a:off x="2286000" y="5843016"/>
-            <a:ext cx="9418320" cy="201168"/>
-          </a:xfrm>
-          <a:prstGeom prst="rect">
-            <a:avLst/>
-          </a:prstGeom>
-          <a:noFill/>
-        </p:spPr>
-        <p:txBody>
-          <a:bodyPr wrap="square" lIns="45720" rIns="45720">
-            <a:spAutoFit/>
-          </a:bodyPr>
-          <a:lstStyle/>
-          <a:p>
-            <a:pPr algn="l"/>
-            <a:r>
-              <a:rPr sz="900" b="0">
-                <a:solidFill>
-                  <a:srgbClr val="8A95A5"/>
-                </a:solidFill>
-                <a:latin typeface="Helvetica Neue"/>
-              </a:rPr>
-              <a:t>•  Per-user quota + rate limits; secret-leak scrubber on all error paths</a:t>
-            </a:r>
-          </a:p>
-        </p:txBody>
-      </p:sp>
-      <p:sp>
-        <p:nvSpPr>
-          <p:cNvPr id="37" name="TextBox 36"/>
-          <p:cNvSpPr txBox="1"/>
-          <p:nvPr/>
-        </p:nvSpPr>
-        <p:spPr>
-          <a:xfrm>
-            <a:off x="640080" y="6044184"/>
-            <a:ext cx="1554480" cy="237744"/>
-          </a:xfrm>
-          <a:prstGeom prst="rect">
-            <a:avLst/>
-          </a:prstGeom>
-          <a:noFill/>
-        </p:spPr>
-        <p:txBody>
-          <a:bodyPr wrap="square" lIns="45720" rIns="45720">
-            <a:spAutoFit/>
-          </a:bodyPr>
-          <a:lstStyle/>
-          <a:p>
-            <a:pPr algn="l"/>
-            <a:r>
-              <a:rPr sz="1100" b="1">
-                <a:solidFill>
-                  <a:srgbClr val="6EC1FF"/>
-                </a:solidFill>
-                <a:latin typeface="Helvetica Neue"/>
-              </a:rPr>
-              <a:t>Tue May 12</a:t>
-            </a:r>
-          </a:p>
-        </p:txBody>
-      </p:sp>
-      <p:sp>
-        <p:nvSpPr>
-          <p:cNvPr id="38" name="TextBox 37"/>
-          <p:cNvSpPr txBox="1"/>
-          <p:nvPr/>
-        </p:nvSpPr>
-        <p:spPr>
-          <a:xfrm>
-            <a:off x="2286000" y="6044184"/>
-            <a:ext cx="9418320" cy="237744"/>
-          </a:xfrm>
-          <a:prstGeom prst="rect">
-            <a:avLst/>
-          </a:prstGeom>
-          <a:noFill/>
-        </p:spPr>
-        <p:txBody>
-          <a:bodyPr wrap="square" lIns="45720" rIns="45720">
-            <a:spAutoFit/>
-          </a:bodyPr>
-          <a:lstStyle/>
-          <a:p>
-            <a:pPr algn="l"/>
-            <a:r>
-              <a:rPr sz="1100" b="1">
-                <a:solidFill>
-                  <a:srgbClr val="E6EAF0"/>
-                </a:solidFill>
-                <a:latin typeface="Helvetica Neue"/>
-              </a:rPr>
-              <a:t>Cross-platform smoke + provider-swap drill</a:t>
-            </a:r>
-          </a:p>
-        </p:txBody>
-      </p:sp>
-      <p:sp>
-        <p:nvSpPr>
-          <p:cNvPr id="39" name="TextBox 38"/>
-          <p:cNvSpPr txBox="1"/>
-          <p:nvPr/>
-        </p:nvSpPr>
-        <p:spPr>
-          <a:xfrm>
-            <a:off x="2286000" y="6217920"/>
-            <a:ext cx="9418320" cy="201168"/>
-          </a:xfrm>
-          <a:prstGeom prst="rect">
-            <a:avLst/>
-          </a:prstGeom>
-          <a:noFill/>
-        </p:spPr>
-        <p:txBody>
-          <a:bodyPr wrap="square" lIns="45720" rIns="45720">
-            <a:spAutoFit/>
-          </a:bodyPr>
-          <a:lstStyle/>
-          <a:p>
-            <a:pPr algn="l"/>
-            <a:r>
-              <a:rPr sz="900" b="0">
-                <a:solidFill>
-                  <a:srgbClr val="8A95A5"/>
-                </a:solidFill>
-                <a:latin typeface="Helvetica Neue"/>
-              </a:rPr>
-              <a:t>•  Clean Windows 11 + macOS dry runs from git clone</a:t>
-            </a:r>
-          </a:p>
-        </p:txBody>
-      </p:sp>
-      <p:sp>
-        <p:nvSpPr>
-          <p:cNvPr id="40" name="TextBox 39"/>
-          <p:cNvSpPr txBox="1"/>
-          <p:nvPr/>
-        </p:nvSpPr>
-        <p:spPr>
-          <a:xfrm>
-            <a:off x="2286000" y="6391656"/>
-            <a:ext cx="9418320" cy="201168"/>
-          </a:xfrm>
-          <a:prstGeom prst="rect">
-            <a:avLst/>
-          </a:prstGeom>
-          <a:noFill/>
-        </p:spPr>
-        <p:txBody>
-          <a:bodyPr wrap="square" lIns="45720" rIns="45720">
-            <a:spAutoFit/>
-          </a:bodyPr>
-          <a:lstStyle/>
-          <a:p>
-            <a:pPr algn="l"/>
-            <a:r>
-              <a:rPr sz="900" b="0">
-                <a:solidFill>
-                  <a:srgbClr val="8A95A5"/>
-                </a:solidFill>
-                <a:latin typeface="Helvetica Neue"/>
-              </a:rPr>
-              <a:t>•  Provider-swap drill: Anthropic → Bedrock → Azure mid-session, no restart</a:t>
-            </a:r>
-          </a:p>
-        </p:txBody>
-      </p:sp>
-      <p:sp>
-        <p:nvSpPr>
-          <p:cNvPr id="41" name="TextBox 40"/>
-          <p:cNvSpPr txBox="1"/>
-          <p:nvPr/>
-        </p:nvSpPr>
-        <p:spPr>
-          <a:xfrm>
-            <a:off x="640080" y="6592824"/>
-            <a:ext cx="1554480" cy="237744"/>
-          </a:xfrm>
-          <a:prstGeom prst="rect">
-            <a:avLst/>
-          </a:prstGeom>
-          <a:noFill/>
-        </p:spPr>
-        <p:txBody>
-          <a:bodyPr wrap="square" lIns="45720" rIns="45720">
-            <a:spAutoFit/>
-          </a:bodyPr>
-          <a:lstStyle/>
-          <a:p>
-            <a:pPr algn="l"/>
-            <a:r>
-              <a:rPr sz="1100" b="1">
-                <a:solidFill>
-                  <a:srgbClr val="6EC1FF"/>
-                </a:solidFill>
-                <a:latin typeface="Helvetica Neue"/>
-              </a:rPr>
-              <a:t>Wed May 13</a:t>
-            </a:r>
-          </a:p>
-        </p:txBody>
-      </p:sp>
-      <p:sp>
-        <p:nvSpPr>
-          <p:cNvPr id="42" name="TextBox 41"/>
-          <p:cNvSpPr txBox="1"/>
-          <p:nvPr/>
-        </p:nvSpPr>
-        <p:spPr>
-          <a:xfrm>
-            <a:off x="2286000" y="6592824"/>
-            <a:ext cx="9418320" cy="237744"/>
-          </a:xfrm>
-          <a:prstGeom prst="rect">
-            <a:avLst/>
-          </a:prstGeom>
-          <a:noFill/>
-        </p:spPr>
-        <p:txBody>
-          <a:bodyPr wrap="square" lIns="45720" rIns="45720">
-            <a:spAutoFit/>
-          </a:bodyPr>
-          <a:lstStyle/>
-          <a:p>
-            <a:pPr algn="l"/>
-            <a:r>
-              <a:rPr sz="1100" b="1">
-                <a:solidFill>
-                  <a:srgbClr val="E6EAF0"/>
-                </a:solidFill>
-                <a:latin typeface="Helvetica Neue"/>
-              </a:rPr>
-              <a:t>Recorded demo — first cut</a:t>
-            </a:r>
-          </a:p>
-        </p:txBody>
-      </p:sp>
-      <p:sp>
-        <p:nvSpPr>
-          <p:cNvPr id="43" name="TextBox 42"/>
-          <p:cNvSpPr txBox="1"/>
-          <p:nvPr/>
-        </p:nvSpPr>
-        <p:spPr>
-          <a:xfrm>
-            <a:off x="2286000" y="6766560"/>
-            <a:ext cx="9418320" cy="201168"/>
-          </a:xfrm>
-          <a:prstGeom prst="rect">
-            <a:avLst/>
-          </a:prstGeom>
-          <a:noFill/>
-        </p:spPr>
-        <p:txBody>
-          <a:bodyPr wrap="square" lIns="45720" rIns="45720">
-            <a:spAutoFit/>
-          </a:bodyPr>
-          <a:lstStyle/>
-          <a:p>
-            <a:pPr algn="l"/>
-            <a:r>
-              <a:rPr sz="900" b="0">
-                <a:solidFill>
-                  <a:srgbClr val="8A95A5"/>
-                </a:solidFill>
-                <a:latin typeface="Helvetica Neue"/>
-              </a:rPr>
-              <a:t>•  Script: connect SQLite demo → ask question → chart + summary → switch to Postgres</a:t>
-            </a:r>
-          </a:p>
-        </p:txBody>
-      </p:sp>
-      <p:sp>
-        <p:nvSpPr>
-          <p:cNvPr id="44" name="TextBox 43"/>
-          <p:cNvSpPr txBox="1"/>
-          <p:nvPr/>
-        </p:nvSpPr>
-        <p:spPr>
-          <a:xfrm>
-            <a:off x="2286000" y="6940296"/>
-            <a:ext cx="9418320" cy="201168"/>
-          </a:xfrm>
-          <a:prstGeom prst="rect">
-            <a:avLst/>
-          </a:prstGeom>
-          <a:noFill/>
-        </p:spPr>
-        <p:txBody>
-          <a:bodyPr wrap="square" lIns="45720" rIns="45720">
-            <a:spAutoFit/>
-          </a:bodyPr>
-          <a:lstStyle/>
-          <a:p>
-            <a:pPr algn="l"/>
-            <a:r>
-              <a:rPr sz="900" b="0">
-                <a:solidFill>
-                  <a:srgbClr val="8A95A5"/>
-                </a:solidFill>
-                <a:latin typeface="Helvetica Neue"/>
-              </a:rPr>
-              <a:t>•  Capture cluster manager drag-to-reassign + Settings UI editing</a:t>
-            </a:r>
-          </a:p>
-        </p:txBody>
-      </p:sp>
-      <p:sp>
-        <p:nvSpPr>
-          <p:cNvPr id="45" name="TextBox 44"/>
-          <p:cNvSpPr txBox="1"/>
-          <p:nvPr/>
-        </p:nvSpPr>
-        <p:spPr>
-          <a:xfrm>
-            <a:off x="2286000" y="7114032"/>
-            <a:ext cx="9418320" cy="201168"/>
-          </a:xfrm>
-          <a:prstGeom prst="rect">
-            <a:avLst/>
-          </a:prstGeom>
-          <a:noFill/>
-        </p:spPr>
-        <p:txBody>
-          <a:bodyPr wrap="square" lIns="45720" rIns="45720">
-            <a:spAutoFit/>
-          </a:bodyPr>
-          <a:lstStyle/>
-          <a:p>
-            <a:pPr algn="l"/>
-            <a:r>
-              <a:rPr sz="900" b="0">
-                <a:solidFill>
-                  <a:srgbClr val="8A95A5"/>
-                </a:solidFill>
-                <a:latin typeface="Helvetica Neue"/>
-              </a:rPr>
-              <a:t>•  Edit + caption pass</a:t>
-            </a:r>
-          </a:p>
-        </p:txBody>
-      </p:sp>
-      <p:sp>
-        <p:nvSpPr>
-          <p:cNvPr id="46" name="TextBox 45"/>
-          <p:cNvSpPr txBox="1"/>
-          <p:nvPr/>
-        </p:nvSpPr>
-        <p:spPr>
-          <a:xfrm>
-            <a:off x="640080" y="7315200"/>
-            <a:ext cx="1554480" cy="237744"/>
-          </a:xfrm>
-          <a:prstGeom prst="rect">
-            <a:avLst/>
-          </a:prstGeom>
-          <a:noFill/>
-        </p:spPr>
-        <p:txBody>
-          <a:bodyPr wrap="square" lIns="45720" rIns="45720">
-            <a:spAutoFit/>
-          </a:bodyPr>
-          <a:lstStyle/>
-          <a:p>
-            <a:pPr algn="l"/>
-            <a:r>
-              <a:rPr sz="1100" b="1">
-                <a:solidFill>
-                  <a:srgbClr val="6EC1FF"/>
-                </a:solidFill>
-                <a:latin typeface="Helvetica Neue"/>
-              </a:rPr>
-              <a:t>Thu May 14</a:t>
-            </a:r>
-          </a:p>
-        </p:txBody>
-      </p:sp>
-      <p:sp>
-        <p:nvSpPr>
-          <p:cNvPr id="47" name="TextBox 46"/>
-          <p:cNvSpPr txBox="1"/>
-          <p:nvPr/>
-        </p:nvSpPr>
-        <p:spPr>
-          <a:xfrm>
-            <a:off x="2286000" y="7315200"/>
-            <a:ext cx="9418320" cy="237744"/>
-          </a:xfrm>
-          <a:prstGeom prst="rect">
-            <a:avLst/>
-          </a:prstGeom>
-          <a:noFill/>
-        </p:spPr>
-        <p:txBody>
-          <a:bodyPr wrap="square" lIns="45720" rIns="45720">
-            <a:spAutoFit/>
-          </a:bodyPr>
-          <a:lstStyle/>
-          <a:p>
-            <a:pPr algn="l"/>
-            <a:r>
-              <a:rPr sz="1100" b="1">
-                <a:solidFill>
-                  <a:srgbClr val="E6EAF0"/>
-                </a:solidFill>
-                <a:latin typeface="Helvetica Neue"/>
-              </a:rPr>
-              <a:t>Recorded demo polish + final eval gate</a:t>
-            </a:r>
-          </a:p>
-        </p:txBody>
-      </p:sp>
-      <p:sp>
-        <p:nvSpPr>
-          <p:cNvPr id="48" name="TextBox 47"/>
-          <p:cNvSpPr txBox="1"/>
-          <p:nvPr/>
-        </p:nvSpPr>
-        <p:spPr>
-          <a:xfrm>
-            <a:off x="2286000" y="7488936"/>
-            <a:ext cx="9418320" cy="201168"/>
-          </a:xfrm>
-          <a:prstGeom prst="rect">
-            <a:avLst/>
-          </a:prstGeom>
-          <a:noFill/>
-        </p:spPr>
-        <p:txBody>
-          <a:bodyPr wrap="square" lIns="45720" rIns="45720">
-            <a:spAutoFit/>
-          </a:bodyPr>
-          <a:lstStyle/>
-          <a:p>
-            <a:pPr algn="l"/>
-            <a:r>
-              <a:rPr sz="900" b="0">
-                <a:solidFill>
-                  <a:srgbClr val="8A95A5"/>
-                </a:solidFill>
-                <a:latin typeface="Helvetica Neue"/>
-              </a:rPr>
-              <a:t>•  Re-record any segments where the live system stuttered</a:t>
-            </a:r>
-          </a:p>
-        </p:txBody>
-      </p:sp>
-      <p:sp>
-        <p:nvSpPr>
-          <p:cNvPr id="49" name="TextBox 48"/>
-          <p:cNvSpPr txBox="1"/>
-          <p:nvPr/>
-        </p:nvSpPr>
-        <p:spPr>
-          <a:xfrm>
-            <a:off x="2286000" y="7662672"/>
-            <a:ext cx="9418320" cy="201168"/>
-          </a:xfrm>
-          <a:prstGeom prst="rect">
-            <a:avLst/>
-          </a:prstGeom>
-          <a:noFill/>
-        </p:spPr>
-        <p:txBody>
-          <a:bodyPr wrap="square" lIns="45720" rIns="45720">
-            <a:spAutoFit/>
-          </a:bodyPr>
-          <a:lstStyle/>
-          <a:p>
-            <a:pPr algn="l"/>
-            <a:r>
-              <a:rPr sz="900" b="0">
-                <a:solidFill>
-                  <a:srgbClr val="8A95A5"/>
-                </a:solidFill>
-                <a:latin typeface="Helvetica Neue"/>
-              </a:rPr>
-              <a:t>•  Final eval suite run against v0.9 candidate; capture metrics for release notes</a:t>
-            </a:r>
-          </a:p>
-        </p:txBody>
-      </p:sp>
-      <p:sp>
-        <p:nvSpPr>
-          <p:cNvPr id="50" name="TextBox 49"/>
-          <p:cNvSpPr txBox="1"/>
-          <p:nvPr/>
-        </p:nvSpPr>
-        <p:spPr>
-          <a:xfrm>
-            <a:off x="640080" y="7863840"/>
-            <a:ext cx="1554480" cy="237744"/>
-          </a:xfrm>
-          <a:prstGeom prst="rect">
-            <a:avLst/>
-          </a:prstGeom>
-          <a:noFill/>
-        </p:spPr>
-        <p:txBody>
-          <a:bodyPr wrap="square" lIns="45720" rIns="45720">
-            <a:spAutoFit/>
-          </a:bodyPr>
-          <a:lstStyle/>
-          <a:p>
-            <a:pPr algn="l"/>
-            <a:r>
-              <a:rPr sz="1100" b="1">
-                <a:solidFill>
-                  <a:srgbClr val="6EC1FF"/>
-                </a:solidFill>
-                <a:latin typeface="Helvetica Neue"/>
-              </a:rPr>
-              <a:t>Fri May 15</a:t>
-            </a:r>
-          </a:p>
-        </p:txBody>
-      </p:sp>
-      <p:sp>
-        <p:nvSpPr>
-          <p:cNvPr id="51" name="TextBox 50"/>
-          <p:cNvSpPr txBox="1"/>
-          <p:nvPr/>
-        </p:nvSpPr>
-        <p:spPr>
-          <a:xfrm>
-            <a:off x="2286000" y="7863840"/>
-            <a:ext cx="9418320" cy="237744"/>
-          </a:xfrm>
-          <a:prstGeom prst="rect">
-            <a:avLst/>
-          </a:prstGeom>
-          <a:noFill/>
-        </p:spPr>
-        <p:txBody>
-          <a:bodyPr wrap="square" lIns="45720" rIns="45720">
-            <a:spAutoFit/>
-          </a:bodyPr>
-          <a:lstStyle/>
-          <a:p>
-            <a:pPr algn="l"/>
-            <a:r>
-              <a:rPr sz="1100" b="1">
-                <a:solidFill>
-                  <a:srgbClr val="E6EAF0"/>
-                </a:solidFill>
-                <a:latin typeface="Helvetica Neue"/>
-              </a:rPr>
-              <a:t>Release-day prep</a:t>
-            </a:r>
-          </a:p>
-        </p:txBody>
-      </p:sp>
-      <p:sp>
-        <p:nvSpPr>
-          <p:cNvPr id="52" name="TextBox 51"/>
-          <p:cNvSpPr txBox="1"/>
-          <p:nvPr/>
-        </p:nvSpPr>
-        <p:spPr>
-          <a:xfrm>
-            <a:off x="2286000" y="8037576"/>
-            <a:ext cx="9418320" cy="201168"/>
-          </a:xfrm>
-          <a:prstGeom prst="rect">
-            <a:avLst/>
-          </a:prstGeom>
-          <a:noFill/>
-        </p:spPr>
-        <p:txBody>
-          <a:bodyPr wrap="square" lIns="45720" rIns="45720">
-            <a:spAutoFit/>
-          </a:bodyPr>
-          <a:lstStyle/>
-          <a:p>
-            <a:pPr algn="l"/>
-            <a:r>
-              <a:rPr sz="900" b="0">
-                <a:solidFill>
-                  <a:srgbClr val="8A95A5"/>
-                </a:solidFill>
-                <a:latin typeface="Helvetica Neue"/>
-              </a:rPr>
-              <a:t>•  v0.9 release-candidate tag; smoke test on clean machines</a:t>
+              <a:t>•  Internal announcement; v0.10 backlog opened (observability stretch + extras)</a:t>
             </a:r>
           </a:p>
         </p:txBody>
@@ -13020,216 +13020,6 @@
       <p:sp>
         <p:nvSpPr>
           <p:cNvPr id="53" name="TextBox 52"/>
-          <p:cNvSpPr txBox="1"/>
-          <p:nvPr/>
-        </p:nvSpPr>
-        <p:spPr>
-          <a:xfrm>
-            <a:off x="2286000" y="8211312"/>
-            <a:ext cx="9418320" cy="201168"/>
-          </a:xfrm>
-          <a:prstGeom prst="rect">
-            <a:avLst/>
-          </a:prstGeom>
-          <a:noFill/>
-        </p:spPr>
-        <p:txBody>
-          <a:bodyPr wrap="square" lIns="45720" rIns="45720">
-            <a:spAutoFit/>
-          </a:bodyPr>
-          <a:lstStyle/>
-          <a:p>
-            <a:pPr algn="l"/>
-            <a:r>
-              <a:rPr sz="900" b="0">
-                <a:solidFill>
-                  <a:srgbClr val="8A95A5"/>
-                </a:solidFill>
-                <a:latin typeface="Helvetica Neue"/>
-              </a:rPr>
-              <a:t>•  Operator runbook + provider-swap guide finalized</a:t>
-            </a:r>
-          </a:p>
-        </p:txBody>
-      </p:sp>
-      <p:sp>
-        <p:nvSpPr>
-          <p:cNvPr id="54" name="TextBox 53"/>
-          <p:cNvSpPr txBox="1"/>
-          <p:nvPr/>
-        </p:nvSpPr>
-        <p:spPr>
-          <a:xfrm>
-            <a:off x="2286000" y="8385048"/>
-            <a:ext cx="9418320" cy="201168"/>
-          </a:xfrm>
-          <a:prstGeom prst="rect">
-            <a:avLst/>
-          </a:prstGeom>
-          <a:noFill/>
-        </p:spPr>
-        <p:txBody>
-          <a:bodyPr wrap="square" lIns="45720" rIns="45720">
-            <a:spAutoFit/>
-          </a:bodyPr>
-          <a:lstStyle/>
-          <a:p>
-            <a:pPr algn="l"/>
-            <a:r>
-              <a:rPr sz="900" b="0">
-                <a:solidFill>
-                  <a:srgbClr val="8A95A5"/>
-                </a:solidFill>
-                <a:latin typeface="Helvetica Neue"/>
-              </a:rPr>
-              <a:t>•  Final read-through of release notes</a:t>
-            </a:r>
-          </a:p>
-        </p:txBody>
-      </p:sp>
-      <p:sp>
-        <p:nvSpPr>
-          <p:cNvPr id="55" name="TextBox 54"/>
-          <p:cNvSpPr txBox="1"/>
-          <p:nvPr/>
-        </p:nvSpPr>
-        <p:spPr>
-          <a:xfrm>
-            <a:off x="640080" y="8586216"/>
-            <a:ext cx="1554480" cy="237744"/>
-          </a:xfrm>
-          <a:prstGeom prst="rect">
-            <a:avLst/>
-          </a:prstGeom>
-          <a:noFill/>
-        </p:spPr>
-        <p:txBody>
-          <a:bodyPr wrap="square" lIns="45720" rIns="45720">
-            <a:spAutoFit/>
-          </a:bodyPr>
-          <a:lstStyle/>
-          <a:p>
-            <a:pPr algn="l"/>
-            <a:r>
-              <a:rPr sz="1100" b="1">
-                <a:solidFill>
-                  <a:srgbClr val="4AD09C"/>
-                </a:solidFill>
-                <a:latin typeface="Helvetica Neue"/>
-              </a:rPr>
-              <a:t>Sat May 16</a:t>
-            </a:r>
-          </a:p>
-        </p:txBody>
-      </p:sp>
-      <p:sp>
-        <p:nvSpPr>
-          <p:cNvPr id="56" name="TextBox 55"/>
-          <p:cNvSpPr txBox="1"/>
-          <p:nvPr/>
-        </p:nvSpPr>
-        <p:spPr>
-          <a:xfrm>
-            <a:off x="2286000" y="8586216"/>
-            <a:ext cx="9418320" cy="237744"/>
-          </a:xfrm>
-          <a:prstGeom prst="rect">
-            <a:avLst/>
-          </a:prstGeom>
-          <a:noFill/>
-        </p:spPr>
-        <p:txBody>
-          <a:bodyPr wrap="square" lIns="45720" rIns="45720">
-            <a:spAutoFit/>
-          </a:bodyPr>
-          <a:lstStyle/>
-          <a:p>
-            <a:pPr algn="l"/>
-            <a:r>
-              <a:rPr sz="1100" b="1">
-                <a:solidFill>
-                  <a:srgbClr val="E6EAF0"/>
-                </a:solidFill>
-                <a:latin typeface="Helvetica Neue"/>
-              </a:rPr>
-              <a:t>v0.9 RELEASE</a:t>
-            </a:r>
-          </a:p>
-        </p:txBody>
-      </p:sp>
-      <p:sp>
-        <p:nvSpPr>
-          <p:cNvPr id="57" name="TextBox 56"/>
-          <p:cNvSpPr txBox="1"/>
-          <p:nvPr/>
-        </p:nvSpPr>
-        <p:spPr>
-          <a:xfrm>
-            <a:off x="2286000" y="8759952"/>
-            <a:ext cx="9418320" cy="201168"/>
-          </a:xfrm>
-          <a:prstGeom prst="rect">
-            <a:avLst/>
-          </a:prstGeom>
-          <a:noFill/>
-        </p:spPr>
-        <p:txBody>
-          <a:bodyPr wrap="square" lIns="45720" rIns="45720">
-            <a:spAutoFit/>
-          </a:bodyPr>
-          <a:lstStyle/>
-          <a:p>
-            <a:pPr algn="l"/>
-            <a:r>
-              <a:rPr sz="900" b="0">
-                <a:solidFill>
-                  <a:srgbClr val="8A95A5"/>
-                </a:solidFill>
-                <a:latin typeface="Helvetica Neue"/>
-              </a:rPr>
-              <a:t>•  Tag v0.9 on main; push to GitHub Releases with recorded demo attached</a:t>
-            </a:r>
-          </a:p>
-        </p:txBody>
-      </p:sp>
-      <p:sp>
-        <p:nvSpPr>
-          <p:cNvPr id="58" name="TextBox 57"/>
-          <p:cNvSpPr txBox="1"/>
-          <p:nvPr/>
-        </p:nvSpPr>
-        <p:spPr>
-          <a:xfrm>
-            <a:off x="2286000" y="8933688"/>
-            <a:ext cx="9418320" cy="201168"/>
-          </a:xfrm>
-          <a:prstGeom prst="rect">
-            <a:avLst/>
-          </a:prstGeom>
-          <a:noFill/>
-        </p:spPr>
-        <p:txBody>
-          <a:bodyPr wrap="square" lIns="45720" rIns="45720">
-            <a:spAutoFit/>
-          </a:bodyPr>
-          <a:lstStyle/>
-          <a:p>
-            <a:pPr algn="l"/>
-            <a:r>
-              <a:rPr sz="900" b="0">
-                <a:solidFill>
-                  <a:srgbClr val="8A95A5"/>
-                </a:solidFill>
-                <a:latin typeface="Helvetica Neue"/>
-              </a:rPr>
-              <a:t>•  Announce internally; client-facing summary distributed</a:t>
-            </a:r>
-          </a:p>
-        </p:txBody>
-      </p:sp>
-      <p:sp>
-        <p:nvSpPr>
-          <p:cNvPr id="59" name="TextBox 58"/>
           <p:cNvSpPr txBox="1"/>
           <p:nvPr/>
         </p:nvSpPr>
@@ -13257,14 +13047,14 @@
                 </a:solidFill>
                 <a:latin typeface="Helvetica Neue"/>
               </a:rPr>
-              <a:t>Plan · 11 working days + release</a:t>
-            </a:r>
-          </a:p>
-        </p:txBody>
-      </p:sp>
-      <p:sp>
-        <p:nvSpPr>
-          <p:cNvPr id="60" name="TextBox 59"/>
+              <a:t>Plan · 6 working weeks + release day</a:t>
+            </a:r>
+          </a:p>
+        </p:txBody>
+      </p:sp>
+      <p:sp>
+        <p:nvSpPr>
+          <p:cNvPr id="54" name="TextBox 53"/>
           <p:cNvSpPr txBox="1"/>
           <p:nvPr/>
         </p:nvSpPr>
@@ -13994,7 +13784,7 @@
                 </a:solidFill>
                 <a:latin typeface="Helvetica Neue"/>
               </a:rPr>
-              <a:t>Plan: Pre-record the full flow Wed May 13 + polish Thu May 14; live Q&amp;A only.</a:t>
+              <a:t>Plan: Pre-record the full flow in Week 6 + polish before release-day; live Q&amp;A only.</a:t>
             </a:r>
           </a:p>
         </p:txBody>
@@ -14125,7 +13915,7 @@
                 </a:solidFill>
                 <a:latin typeface="Helvetica Neue"/>
               </a:rPr>
-              <a:t>What you'll see at the May 16 demo</a:t>
+              <a:t>What you'll see at the v0.9 demo (June 13)</a:t>
             </a:r>
           </a:p>
         </p:txBody>
@@ -14357,7 +14147,7 @@
                 </a:solidFill>
                 <a:latin typeface="Helvetica Neue"/>
               </a:rPr>
-              <a:t>Demo machine: clean Windows install · no prior setup · v0.9 tagged Sat May 16</a:t>
+              <a:t>Demo machine: clean Windows install · no prior setup · v0.9 tagged Fri June 13</a:t>
             </a:r>
           </a:p>
         </p:txBody>
@@ -14453,7 +14243,7 @@
                 </a:solidFill>
                 <a:latin typeface="Helvetica Neue"/>
               </a:rPr>
-              <a:t>13 core components green and tested · 4 workstreams remaining for v0.9 on May 16</a:t>
+              <a:t>13 core components green and tested · 4 workstreams remaining for v0.9 on Fri June 13</a:t>
             </a:r>
           </a:p>
         </p:txBody>
@@ -15535,7 +15325,7 @@
                 </a:solidFill>
                 <a:latin typeface="Helvetica Neue"/>
               </a:rPr>
-              <a:t>5 LLM providers + 4 embedding providers wired; cross-product regression matrix lands by May 16</a:t>
+              <a:t>5 LLM providers + 4 embedding providers wired; cross-product regression matrix lands by June 13</a:t>
             </a:r>
           </a:p>
         </p:txBody>
@@ -15901,7 +15691,7 @@
                 </a:solidFill>
                 <a:latin typeface="Helvetica Neue"/>
               </a:rPr>
-              <a:t>v0.9 release · Sat May 16, 2026</a:t>
+              <a:t>v0.9 release · Fri June 13, 2026</a:t>
             </a:r>
           </a:p>
         </p:txBody>
@@ -16787,7 +16577,7 @@
                 </a:solidFill>
                 <a:latin typeface="Helvetica Neue"/>
               </a:rPr>
-              <a:t>Every layer is built and tested today; the work to May 16 is polish and recorded demo</a:t>
+              <a:t>Every layer is built and tested today; the work to Fri June 13 is polish, hardening, and recorded demo</a:t>
             </a:r>
           </a:p>
         </p:txBody>
